--- a/smp-defense-redesign-v4.pptx
+++ b/smp-defense-redesign-v4.pptx
@@ -124,6 +124,11 @@
       </a:defRPr>
     </a:lvl9pPr>
   </p:defaultTextStyle>
+  <p:extLst>
+    <p:ext uri="{EFAFB233-063F-42B5-8137-9DF3F51BA10A}">
+      <p15:sldGuideLst xmlns:p15="http://schemas.microsoft.com/office/powerpoint/2012/main"/>
+    </p:ext>
+  </p:extLst>
 </p:presentation>
 </file>
 
@@ -351,6 +356,21 @@
               <a:t>强调本答辩重点：哪些地方没有照搬教程建议、为什么这样做、关键竞态如何处理。</a:t>
             </a:r>
           </a:p>
+          <a:p>
+            <a:r>
+              <a:t>【可直接朗读】</a:t>
+            </a:r>
+          </a:p>
+          <a:p>
+            <a:r>
+              <a:t>大家好，我这次汇报的是 MOS 的 SMP 多核移植。简单说，就是把原来偏单核运行的 MOS，改到 QEMU Malta 的两个 vCPU 上，让它能完成启动、调度、IPI 通信和基本用户态工作流。</a:t>
+            </a:r>
+          </a:p>
+          <a:p>
+            <a:r>
+              <a:t>这一版我不会只讲结果，还会重点讲几个设计取舍：哪些地方和教程建议不一样，为什么这样做，以及遇到竞态之后是怎么一点点修掉的。</a:t>
+            </a:r>
+          </a:p>
         </p:txBody>
       </p:sp>
       <p:sp>
@@ -433,6 +453,21 @@
               <a:t>IDE PIO 操作顺序性很强，因此用户态 ide_lock 保护完整读写序列，内核 dev syscall 也对 console 和 IDE MMIO 分别加锁。</a:t>
             </a:r>
           </a:p>
+          <a:p>
+            <a:r>
+              <a:t>【可直接朗读】</a:t>
+            </a:r>
+          </a:p>
+          <a:p>
+            <a:r>
+              <a:t>文件系统和设备这一页主要讲工程取舍。fs_serv 被固定在 CPU0，是为了让文件系统服务和 IDE 设备访问先保持可控，不把问题一下子扩大到所有共享状态都并发。</a:t>
+            </a:r>
+          </a:p>
+          <a:p>
+            <a:r>
+              <a:t>但这不影响普通用户程序在两个 CPU 上调度。CPU1 上的程序需要读文件时，仍然可以通过 IPC 请求 fs_serv。对于 console 和 IDE 这些直接设备路径，我们也加了锁，保证访问顺序不会乱掉。</a:t>
+            </a:r>
+          </a:p>
         </p:txBody>
       </p:sp>
       <p:sp>
@@ -515,6 +550,21 @@
               <a:t>可以把 lab6_7 当作重点案例：双向远端销毁暴露了 timer reentry 和嵌套 IPI 的问题。</a:t>
             </a:r>
           </a:p>
+          <a:p>
+            <a:r>
+              <a:t>【可直接朗读】</a:t>
+            </a:r>
+          </a:p>
+          <a:p>
+            <a:r>
+              <a:t>这一页是测试反过来推动修复的几个例子。刚开始能跑起来不代表多核就安全，因为很多竞态只有在两个 CPU 同时操作时才会出现。</a:t>
+            </a:r>
+          </a:p>
+          <a:p>
+            <a:r>
+              <a:t>比如远端 destroy、IPI handler 里直接 free、等待时被 timer 打断，这些问题都是通过 lab 测试暴露出来的。最后我们把释放放到调度安全点，把等待期间的中断处理收紧，系统才稳定下来。</a:t>
+            </a:r>
+          </a:p>
         </p:txBody>
       </p:sp>
       <p:sp>
@@ -597,6 +647,21 @@
               <a:t>第二张图用于解释双向 IPI 不是普通单向发送，等待 ipi_done 时仍处理本 CPU pending IPI，是为了避免双方互等。</a:t>
             </a:r>
           </a:p>
+          <a:p>
+            <a:r>
+              <a:t>【可直接朗读】</a:t>
+            </a:r>
+          </a:p>
+          <a:p>
+            <a:r>
+              <a:t>这一页是验证双核启动和基础 IPI。现场看的重点是日志里要出现 slave online，说明 CPU1 真的上线了，不只是 QEMU 参数里写了两个核。</a:t>
+            </a:r>
+          </a:p>
+          <a:p>
+            <a:r>
+              <a:t>然后看 100 次 IPI 调用，CPU0 能让 CPU1 执行指定函数，并且 count 能稳定到 100。这个结果说明 mailbox 的参数传递、pending 标志和 done 等待机制基本是可靠的。</a:t>
+            </a:r>
+          </a:p>
         </p:txBody>
       </p:sp>
       <p:sp>
@@ -677,6 +742,21 @@
           <a:p>
             <a:r>
               <a:t>第二张图用于解释双向 IPI 不是普通单向发送，等待 ipi_done 时仍处理本 CPU pending IPI，是为了避免双方互等。</a:t>
+            </a:r>
+          </a:p>
+          <a:p>
+            <a:r>
+              <a:t>【可直接朗读】</a:t>
+            </a:r>
+          </a:p>
+          <a:p>
+            <a:r>
+              <a:t>这一页是更强一点的 IPI 测试。基础测试主要是 CPU0 调 CPU1，而这里会做双向嵌套，也就是 CPU1 在处理调用时再反过来让 CPU0 做回调。</a:t>
+            </a:r>
+          </a:p>
+          <a:p>
+            <a:r>
+              <a:t>这个测试的意义是证明等待逻辑没有简单地死等。如果一个 CPU 正在等 done，但自己也收到了 pending IPI，它会先处理掉，所以两个 CPU 不会因为互相等待而卡住。</a:t>
             </a:r>
           </a:p>
         </p:txBody>
@@ -766,6 +846,21 @@
               <a:t>如果被问 FS 是否完整多核化，可以回到第 10 页：这是工程边界，不是禁止 CPU1 用户进程访问文件。</a:t>
             </a:r>
           </a:p>
+          <a:p>
+            <a:r>
+              <a:t>【可直接朗读】</a:t>
+            </a:r>
+          </a:p>
+          <a:p>
+            <a:r>
+              <a:t>这一页把多核调度和 shell 放在一起看。调度日志里能看到 CPU0 和 CPU1 都有运行用户进程，说明不是只有主核在干活，从核也进入了 env_run 这些路径。</a:t>
+            </a:r>
+          </a:p>
+          <a:p>
+            <a:r>
+              <a:t>shell 能跑起来也很重要，因为它会经过文件系统、用户程序、IPC、进程创建和销毁等一整条链路。也就是说，这不只是一个单独的内核小测试，而是用户态工作流也能走通。</a:t>
+            </a:r>
+          </a:p>
         </p:txBody>
       </p:sp>
       <p:sp>
@@ -846,6 +941,21 @@
           <a:p>
             <a:r>
               <a:t>如果被问 FS 是否完整多核化，可以回到第 10 页：这是工程边界，不是禁止 CPU1 用户进程访问文件。</a:t>
+            </a:r>
+          </a:p>
+          <a:p>
+            <a:r>
+              <a:t>【可直接朗读】</a:t>
+            </a:r>
+          </a:p>
+          <a:p>
+            <a:r>
+              <a:t>这一页主要展示 shell、文件系统和用户程序的实际效果。比如 ls、cat、脚本执行这些命令能正常输出，说明 fs_serv、用户程序加载和基础文件读取都能配合起来。</a:t>
+            </a:r>
+          </a:p>
+          <a:p>
+            <a:r>
+              <a:t>如果老师问为什么 fs_serv 固定在 CPU0，我会解释这是为了先保证设备和文件系统状态稳定；普通用户程序仍然能在两个 CPU 上跑，需要文件时通过 IPC 访问服务。</a:t>
             </a:r>
           </a:p>
         </p:txBody>
@@ -935,6 +1045,21 @@
               <a:t>再说修复：kill_pending 标记关闭调度窗口，IPI 只作为 poke，真正释放放在目标 CPU 的调度安全点。</a:t>
             </a:r>
           </a:p>
+          <a:p>
+            <a:r>
+              <a:t>【可直接朗读】</a:t>
+            </a:r>
+          </a:p>
+          <a:p>
+            <a:r>
+              <a:t>这一页对应前面远端 env 销毁的设计。验证点是：目标 env 如果正在另一个 CPU 上运行，发起销毁的 CPU 不会直接释放它，而是让目标 CPU 到安全点后自己释放。</a:t>
+            </a:r>
+          </a:p>
+          <a:p>
+            <a:r>
+              <a:t>这样做虽然看起来绕了一步，但能避免很实际的问题：一个 CPU 还在用 env 的页表，另一个 CPU 已经把它释放掉。我们用 kill_pending、IPI poke 和 kill_done 来把这个流程串起来。</a:t>
+            </a:r>
+          </a:p>
         </p:txBody>
       </p:sp>
       <p:sp>
@@ -1017,6 +1142,21 @@
               <a:t>最后补一句共同修改区的协作规则：接口先行、分阶段合并、避免大范围格式化。</a:t>
             </a:r>
           </a:p>
+          <a:p>
+            <a:r>
+              <a:t>【可直接朗读】</a:t>
+            </a:r>
+          </a:p>
+          <a:p>
+            <a:r>
+              <a:t>分工上我们大致分成两条线。杨璞主要负责让两个 CPU 能启动起来，并且把每核状态、异常入口、IPI 和基础锁这些底层设施搭好。</a:t>
+            </a:r>
+          </a:p>
+          <a:p>
+            <a:r>
+              <a:t>李昊泽主要负责把单核时代的共享状态改成多核安全，比如调度、页表、TLB shootdown、远端 env 生命周期，以及 fs_serv 的 CPU0 绑定策略。共同改的接口文件会先约好声明，再分阶段合并，尽量减少互相冲突。</a:t>
+            </a:r>
+          </a:p>
         </p:txBody>
       </p:sp>
       <p:sp>
@@ -1099,6 +1239,21 @@
               <a:t>如果被问不足：默认 IPI 是共享内存模拟、pmap_lock 粗粒度、env_free shootdown 没做批量优化，后续可换硬件 IPI、细粒度页表锁或批量 TLB shootdown。</a:t>
             </a:r>
           </a:p>
+          <a:p>
+            <a:r>
+              <a:t>【可直接朗读】</a:t>
+            </a:r>
+          </a:p>
+          <a:p>
+            <a:r>
+              <a:t>最后总结一下，这次移植完成了两核启动、每核独立状态、IPI 远程调用、TLB shootdown、多核调度，以及 shell 和文件系统的基本工作流。</a:t>
+            </a:r>
+          </a:p>
+          <a:p>
+            <a:r>
+              <a:t>当然它还有工程边界，比如默认 IPI 是共享内存模拟，pmap_lock 也比较粗，fs_serv 还是固定在 CPU0。我的理解是，这一版先把 SMP 的关键语义和主要竞态跑通，后面再继续做更细的优化。</a:t>
+            </a:r>
+          </a:p>
         </p:txBody>
       </p:sp>
       <p:sp>
@@ -1181,6 +1336,21 @@
               <a:t>说明 fs_serv 固定 CPU0 不是逃避用户进程多核，而是把真实 IDE/block cache/open table 集中到服务进程，普通用户进程仍能在两个 CPU 上调度并通过 IPC 请求 FS。</a:t>
             </a:r>
           </a:p>
+          <a:p>
+            <a:r>
+              <a:t>【可直接朗读】</a:t>
+            </a:r>
+          </a:p>
+          <a:p>
+            <a:r>
+              <a:t>这一页先把任务范围说清楚。我们的目标是支持两个 CPU，能够启动 shell，普通用户进程可以被调度到不同 CPU 上，同时要有 IPI 和内存同步相关的处理。</a:t>
+            </a:r>
+          </a:p>
+          <a:p>
+            <a:r>
+              <a:t>这里有一个工程上的边界：文件系统服务 fs_serv 固定在 CPU0。这样做不是说 CPU1 不能访问文件，而是普通进程通过 IPC 找 fs_serv 办事，这样可以先把块设备这些复杂并发集中起来，保证整体能稳定跑通。</a:t>
+            </a:r>
+          </a:p>
         </p:txBody>
       </p:sp>
       <p:sp>
@@ -1263,6 +1433,21 @@
               <a:t>整体论点：教程给的是推荐路径而非唯一实现；本实现保留了语义目标，比如 per-CPU 状态、远程函数调用、TLB 同步，只是在 QEMU 和工程复杂度下换了实现方式。</a:t>
             </a:r>
           </a:p>
+          <a:p>
+            <a:r>
+              <a:t>【可直接朗读】</a:t>
+            </a:r>
+          </a:p>
+          <a:p>
+            <a:r>
+              <a:t>这一页主要说明我们没有完全照着教程路线写。比如教程建议用 gp 寄存器保存每核指针，但我们用的是 cpu_data 数组加 cpu_id()，这样汇编入口和异常路径会简单一些。</a:t>
+            </a:r>
+          </a:p>
+          <a:p>
+            <a:r>
+              <a:t>我觉得这里最重要的是语义没有变：每个 CPU 还是有自己的当前进程、页目录和调度状态，IPI 也还是完成远程调用和 TLB 同步。只是为了适配 QEMU Malta 和课程内核的复杂度，具体实现方式做了取舍。</a:t>
+            </a:r>
+          </a:p>
         </p:txBody>
       </p:sp>
       <p:sp>
@@ -1345,6 +1530,21 @@
               <a:t>关键点是 CPU1 不清 .bss，否则会破坏 CPU0 已初始化的全局状态；并且每个 CPU 按 CPU ID 计算自己的内核栈。</a:t>
             </a:r>
           </a:p>
+          <a:p>
+            <a:r>
+              <a:t>【可直接朗读】</a:t>
+            </a:r>
+          </a:p>
+          <a:p>
+            <a:r>
+              <a:t>启动这里的思路是，所有 CPU 都先进同一个 _start，然后根据 EBase 低位判断自己是 CPU0 还是 CPU1。CPU0 负责清 bss、初始化全局状态，CPU1 先等在启动栅栏上。</a:t>
+            </a:r>
+          </a:p>
+          <a:p>
+            <a:r>
+              <a:t>这个地方有个容易出错的点：从核不能再清一次 bss。因为 bss 是全局共享区，如果 CPU1 后面又清一次，就可能把 CPU0 已经初始化好的锁、队列和状态都清掉，所以从核只等待，等 CPU0 准备好之后再继续。</a:t>
+            </a:r>
+          </a:p>
         </p:txBody>
       </p:sp>
       <p:sp>
@@ -1427,6 +1627,21 @@
               <a:t>当前保留了 curenv 旧符号但关键路径改用 cpu_curenv、cpu_cur_pgdir、cpu_kstack_top 等接口。</a:t>
             </a:r>
           </a:p>
+          <a:p>
+            <a:r>
+              <a:t>【可直接朗读】</a:t>
+            </a:r>
+          </a:p>
+          <a:p>
+            <a:r>
+              <a:t>在单核里，全局的 curenv 和 cur_pgdir 看起来没问题，因为同一时间只有一个 CPU 在跑。但到 SMP 之后，CPU0 和 CPU1 可能正在跑两个不同进程，所以“当前进程”必须变成每核自己的概念。</a:t>
+            </a:r>
+          </a:p>
+          <a:p>
+            <a:r>
+              <a:t>我们这里没有占用 gp 寄存器，而是通过 cpu_id() 找到 cpu_data[cpu]。这样写性能上可能不是最极致，但是逻辑比较直接，也减少了汇编入口里维护特殊寄存器的负担。</a:t>
+            </a:r>
+          </a:p>
         </p:txBody>
       </p:sp>
       <p:sp>
@@ -1509,6 +1724,21 @@
               <a:t>等待 ipi_done 的循环里如果本 CPU 收到 IPI，会主动 handle_ipi_irq，这是为了避免双向远程调用时双方互等。</a:t>
             </a:r>
           </a:p>
+          <a:p>
+            <a:r>
+              <a:t>【可直接朗读】</a:t>
+            </a:r>
+          </a:p>
+          <a:p>
+            <a:r>
+              <a:t>这一页讲 IPI mailbox。可以把它理解成两个 CPU 之间的小信箱：发起方把要执行的函数和参数写进去，然后设置 pending，目标 CPU 收到 IPI 后取出来执行，执行完再把 done 标志写回去。</a:t>
+            </a:r>
+          </a:p>
+          <a:p>
+            <a:r>
+              <a:t>这里我们做的是同步远程调用，也就是发送方会等目标 CPU 真的执行完。等待的时候还有一个细节：如果本 CPU 也收到了 IPI，就主动处理一下，避免出现两个 CPU 都在等对方、谁也不往前走的情况。</a:t>
+            </a:r>
+          </a:p>
         </p:txBody>
       </p:sp>
       <p:sp>
@@ -1591,6 +1821,21 @@
               <a:t>答辩时一定强调：page_insert/page_remove 在锁内改 PTE 和引用计数，释放 pmap_lock 后再 tlb_invalidate，避免远端 CPU 处理 IPI 时也需要 pmap_lock 造成死锁。</a:t>
             </a:r>
           </a:p>
+          <a:p>
+            <a:r>
+              <a:t>【可直接朗读】</a:t>
+            </a:r>
+          </a:p>
+          <a:p>
+            <a:r>
+              <a:t>TLB shootdown 是 SMP 里必须处理的问题。单核时改完页表，把本地 TLB 对应项清掉就可以了；但多核时，另一个 CPU 的 TLB 里可能还留着旧映射，所以也要通知它失效。</a:t>
+            </a:r>
+          </a:p>
+          <a:p>
+            <a:r>
+              <a:t>我们的处理是先在 pmap_lock 里面把 PTE 和引用计数改完，然后释放锁，再做本地和远端的 TLB 失效。这样做是为了避免远端 CPU 处理 IPI 时又想拿同一把锁，最后卡成死锁。</a:t>
+            </a:r>
+          </a:p>
         </p:txBody>
       </p:sp>
       <p:sp>
@@ -1673,6 +1918,21 @@
               <a:t>选择 env 时在锁内判断 pinned、kill_pending、running 状态，选中后在锁内写 running/cpu_id，关闭两个 CPU 同时选中同一个 env 的窗口。</a:t>
             </a:r>
           </a:p>
+          <a:p>
+            <a:r>
+              <a:t>【可直接朗读】</a:t>
+            </a:r>
+          </a:p>
+          <a:p>
+            <a:r>
+              <a:t>调度这块最核心的问题是，一个 env 不能同时被两个 CPU 选中运行。所以我们给 env 加了 running 和 cpu_id 这样的状态，并且用 env_sched_lock 保护全局 runnable 队列。</a:t>
+            </a:r>
+          </a:p>
+          <a:p>
+            <a:r>
+              <a:t>选进程时会在锁里检查它有没有被固定 CPU、有没有 kill_pending、是不是已经在别的 CPU 上跑。选中之后也在锁里标记 running，这样就把两个 CPU 同时抢到同一个 env 的窗口关掉了。</a:t>
+            </a:r>
+          </a:p>
         </p:txBody>
       </p:sp>
       <p:sp>
@@ -1758,6 +2018,21 @@
           <a:p>
             <a:r>
               <a:t>等待远端释放时临时关本 CPU 全局中断，避免 timer 重入调度测试钩子；但循环中仍主动处理 pending IPI，避免别的 IPI 等待死锁。</a:t>
+            </a:r>
+          </a:p>
+          <a:p>
+            <a:r>
+              <a:t>【可直接朗读】</a:t>
+            </a:r>
+          </a:p>
+          <a:p>
+            <a:r>
+              <a:t>远端 env 销毁是我认为比较关键的竞态。比如 CPU0 想销毁一个正在 CPU1 上运行的 env，如果 CPU0 直接 free，CPU1 可能还在用它的页表和 trapframe，这就很危险。</a:t>
+            </a:r>
+          </a:p>
+          <a:p>
+            <a:r>
+              <a:t>所以我们的做法是，发起 CPU 只把它标记成 kill_pending，并通过 IPI poke 一下目标 CPU。真正释放资源放到目标 CPU 自己进入 schedule 的安全点里做，这样释放发生在本地，也避免在 IPI handler 里套娃式地继续发 IPI。</a:t>
             </a:r>
           </a:p>
         </p:txBody>
@@ -2254,7 +2529,7 @@
               </a:defRPr>
             </a:pPr>
             <a:r>
-              <a:rPr sz="2250">
+              <a:rPr sz="2250" dirty="0" err="1">
                 <a:solidFill>
                   <a:srgbClr val="64748B"/>
                 </a:solidFill>
@@ -2262,8 +2537,16 @@
                 <a:ea typeface="Microsoft YaHei"/>
                 <a:cs typeface="Microsoft YaHei"/>
               </a:rPr>
-              <a:t>实现路线、教程差异与关键代码</a:t>
-            </a:r>
+              <a:t>实现路线与关键代码</a:t>
+            </a:r>
+            <a:endParaRPr sz="2250" dirty="0">
+              <a:solidFill>
+                <a:srgbClr val="64748B"/>
+              </a:solidFill>
+              <a:latin typeface="Microsoft YaHei"/>
+              <a:ea typeface="Microsoft YaHei"/>
+              <a:cs typeface="Microsoft YaHei"/>
+            </a:endParaRPr>
           </a:p>
         </p:txBody>
       </p:sp>
@@ -3130,7 +3413,7 @@
               </a:defRPr>
             </a:pPr>
             <a:r>
-              <a:rPr sz="1200" b="1">
+              <a:rPr sz="1200" b="1" dirty="0">
                 <a:solidFill>
                   <a:srgbClr val="0F766E"/>
                 </a:solidFill>
@@ -3138,7 +3421,7 @@
                 <a:ea typeface="Microsoft YaHei"/>
                 <a:cs typeface="Microsoft YaHei"/>
               </a:rPr>
-              <a:t>MOS SMP DEFENSE</a:t>
+              <a:t>MOS SMP</a:t>
             </a:r>
           </a:p>
         </p:txBody>
@@ -4192,15 +4475,26 @@
               </a:defRPr>
             </a:pPr>
             <a:r>
-              <a:rPr sz="1650">
-                <a:solidFill>
-                  <a:srgbClr val="0F172A"/>
-                </a:solidFill>
-                <a:latin typeface="Microsoft YaHei"/>
-                <a:ea typeface="Microsoft YaHei"/>
-                <a:cs typeface="Microsoft YaHei"/>
-              </a:rPr>
-              <a:t>不是禁止 CPU1 用户进程访问文件，而是把真实文件服务集中在 CPU0</a:t>
+              <a:rPr lang="zh-CN" altLang="en-US" sz="1650" dirty="0">
+                <a:solidFill>
+                  <a:srgbClr val="0F172A"/>
+                </a:solidFill>
+                <a:latin typeface="Microsoft YaHei"/>
+                <a:ea typeface="Microsoft YaHei"/>
+                <a:cs typeface="Microsoft YaHei"/>
+              </a:rPr>
+              <a:t>把文件服务集中在 </a:t>
+            </a:r>
+            <a:r>
+              <a:rPr sz="1650" dirty="0">
+                <a:solidFill>
+                  <a:srgbClr val="0F172A"/>
+                </a:solidFill>
+                <a:latin typeface="Microsoft YaHei"/>
+                <a:ea typeface="Microsoft YaHei"/>
+                <a:cs typeface="Microsoft YaHei"/>
+              </a:rPr>
+              <a:t>CPU0</a:t>
             </a:r>
           </a:p>
           <a:p>
@@ -4219,16 +4513,79 @@
               </a:defRPr>
             </a:pPr>
             <a:r>
-              <a:rPr sz="1650">
-                <a:solidFill>
-                  <a:srgbClr val="0F172A"/>
-                </a:solidFill>
-                <a:latin typeface="Microsoft YaHei"/>
-                <a:ea typeface="Microsoft YaHei"/>
-                <a:cs typeface="Microsoft YaHei"/>
-              </a:rPr>
-              <a:t>console/IDE 直接 syscall 路径也有内核锁保护</a:t>
-            </a:r>
+              <a:rPr sz="1650" dirty="0">
+                <a:solidFill>
+                  <a:srgbClr val="0F172A"/>
+                </a:solidFill>
+                <a:latin typeface="Microsoft YaHei"/>
+                <a:ea typeface="Microsoft YaHei"/>
+                <a:cs typeface="Microsoft YaHei"/>
+              </a:rPr>
+              <a:t>console/IDE </a:t>
+            </a:r>
+            <a:r>
+              <a:rPr sz="1650" dirty="0" err="1">
+                <a:solidFill>
+                  <a:srgbClr val="0F172A"/>
+                </a:solidFill>
+                <a:latin typeface="Microsoft YaHei"/>
+                <a:ea typeface="Microsoft YaHei"/>
+                <a:cs typeface="Microsoft YaHei"/>
+              </a:rPr>
+              <a:t>直接</a:t>
+            </a:r>
+            <a:r>
+              <a:rPr sz="1650" dirty="0">
+                <a:solidFill>
+                  <a:srgbClr val="0F172A"/>
+                </a:solidFill>
+                <a:latin typeface="Microsoft YaHei"/>
+                <a:ea typeface="Microsoft YaHei"/>
+                <a:cs typeface="Microsoft YaHei"/>
+              </a:rPr>
+              <a:t> </a:t>
+            </a:r>
+            <a:r>
+              <a:rPr sz="1650" dirty="0" err="1">
+                <a:solidFill>
+                  <a:srgbClr val="0F172A"/>
+                </a:solidFill>
+                <a:latin typeface="Microsoft YaHei"/>
+                <a:ea typeface="Microsoft YaHei"/>
+                <a:cs typeface="Microsoft YaHei"/>
+              </a:rPr>
+              <a:t>syscall</a:t>
+            </a:r>
+            <a:r>
+              <a:rPr sz="1650" dirty="0">
+                <a:solidFill>
+                  <a:srgbClr val="0F172A"/>
+                </a:solidFill>
+                <a:latin typeface="Microsoft YaHei"/>
+                <a:ea typeface="Microsoft YaHei"/>
+                <a:cs typeface="Microsoft YaHei"/>
+              </a:rPr>
+              <a:t> </a:t>
+            </a:r>
+            <a:r>
+              <a:rPr sz="1650" dirty="0" err="1">
+                <a:solidFill>
+                  <a:srgbClr val="0F172A"/>
+                </a:solidFill>
+                <a:latin typeface="Microsoft YaHei"/>
+                <a:ea typeface="Microsoft YaHei"/>
+                <a:cs typeface="Microsoft YaHei"/>
+              </a:rPr>
+              <a:t>路径也有内核锁保护</a:t>
+            </a:r>
+            <a:endParaRPr sz="1650" dirty="0">
+              <a:solidFill>
+                <a:srgbClr val="0F172A"/>
+              </a:solidFill>
+              <a:latin typeface="Microsoft YaHei"/>
+              <a:ea typeface="Microsoft YaHei"/>
+              <a:cs typeface="Microsoft YaHei"/>
+            </a:endParaRPr>
           </a:p>
         </p:txBody>
       </p:sp>
@@ -4312,7 +4669,7 @@
               </a:defRPr>
             </a:pPr>
             <a:r>
-              <a:rPr sz="1050">
+              <a:rPr sz="1050" dirty="0">
                 <a:solidFill>
                   <a:srgbClr val="64748B"/>
                 </a:solidFill>
@@ -4320,7 +4677,40 @@
                 <a:ea typeface="Microsoft YaHei"/>
                 <a:cs typeface="Microsoft YaHei"/>
               </a:rPr>
-              <a:t>SMP 多核移植实现答辩 / 10</a:t>
+              <a:t>SMP </a:t>
+            </a:r>
+            <a:r>
+              <a:rPr sz="1050" dirty="0" err="1">
+                <a:solidFill>
+                  <a:srgbClr val="64748B"/>
+                </a:solidFill>
+                <a:latin typeface="Microsoft YaHei"/>
+                <a:ea typeface="Microsoft YaHei"/>
+                <a:cs typeface="Microsoft YaHei"/>
+              </a:rPr>
+              <a:t>多核移植实现</a:t>
+            </a:r>
+            <a:r>
+              <a:rPr lang="en-US" sz="1050" dirty="0">
+                <a:solidFill>
+                  <a:srgbClr val="64748B"/>
+                </a:solidFill>
+                <a:latin typeface="Microsoft YaHei"/>
+                <a:ea typeface="Microsoft YaHei"/>
+                <a:cs typeface="Microsoft YaHei"/>
+              </a:rPr>
+              <a:t> </a:t>
+            </a:r>
+            <a:r>
+              <a:rPr sz="1050" dirty="0">
+                <a:solidFill>
+                  <a:srgbClr val="64748B"/>
+                </a:solidFill>
+                <a:latin typeface="Microsoft YaHei"/>
+                <a:ea typeface="Microsoft YaHei"/>
+                <a:cs typeface="Microsoft YaHei"/>
+              </a:rPr>
+              <a:t>/ 10</a:t>
             </a:r>
           </a:p>
         </p:txBody>
@@ -4410,7 +4800,7 @@
               </a:defRPr>
             </a:pPr>
             <a:r>
-              <a:rPr sz="1200" b="1">
+              <a:rPr sz="1200" b="1" dirty="0">
                 <a:solidFill>
                   <a:srgbClr val="0F766E"/>
                 </a:solidFill>
@@ -4418,7 +4808,7 @@
                 <a:ea typeface="Microsoft YaHei"/>
                 <a:cs typeface="Microsoft YaHei"/>
               </a:rPr>
-              <a:t>MOS SMP DEFENSE</a:t>
+              <a:t>MOS SMP</a:t>
             </a:r>
           </a:p>
         </p:txBody>
@@ -5734,8 +6124,8 @@
         </p:nvSpPr>
         <p:spPr>
           <a:xfrm>
-            <a:off x="1905000" y="5334000"/>
-            <a:ext cx="8191500" cy="819150"/>
+            <a:off x="1828800" y="5124449"/>
+            <a:ext cx="8191500" cy="1114423"/>
           </a:xfrm>
           <a:prstGeom prst="roundRect">
             <a:avLst>
@@ -5769,8 +6159,8 @@
         </p:nvSpPr>
         <p:spPr>
           <a:xfrm>
-            <a:off x="2095500" y="5467350"/>
-            <a:ext cx="7810500" cy="228600"/>
+            <a:off x="2019300" y="5257799"/>
+            <a:ext cx="7810500" cy="262217"/>
           </a:xfrm>
           <a:prstGeom prst="rect">
             <a:avLst/>
@@ -5800,7 +6190,7 @@
               </a:defRPr>
             </a:pPr>
             <a:r>
-              <a:rPr sz="1125" b="1">
+              <a:rPr sz="1125" b="1" dirty="0" err="1">
                 <a:solidFill>
                   <a:srgbClr val="93C5FD"/>
                 </a:solidFill>
@@ -5810,6 +6200,14 @@
               </a:rPr>
               <a:t>验证入口</a:t>
             </a:r>
+            <a:endParaRPr sz="1125" b="1" dirty="0">
+              <a:solidFill>
+                <a:srgbClr val="93C5FD"/>
+              </a:solidFill>
+              <a:latin typeface="Cascadia Mono"/>
+              <a:ea typeface="Cascadia Mono"/>
+              <a:cs typeface="Cascadia Mono"/>
+            </a:endParaRPr>
           </a:p>
         </p:txBody>
       </p:sp>
@@ -5829,8 +6227,8 @@
         </p:nvSpPr>
         <p:spPr>
           <a:xfrm>
-            <a:off x="2095500" y="5772150"/>
-            <a:ext cx="7810500" cy="266700"/>
+            <a:off x="2019300" y="5562600"/>
+            <a:ext cx="7810500" cy="305920"/>
           </a:xfrm>
           <a:prstGeom prst="rect">
             <a:avLst/>
@@ -6064,7 +6462,7 @@
               </a:defRPr>
             </a:pPr>
             <a:r>
-              <a:rPr sz="1050">
+              <a:rPr sz="1050" dirty="0">
                 <a:solidFill>
                   <a:srgbClr val="64748B"/>
                 </a:solidFill>
@@ -6072,7 +6470,29 @@
                 <a:ea typeface="Microsoft YaHei"/>
                 <a:cs typeface="Microsoft YaHei"/>
               </a:rPr>
-              <a:t>SMP 多核移植实现答辩 / 11</a:t>
+              <a:t>SMP </a:t>
+            </a:r>
+            <a:r>
+              <a:rPr sz="1050" dirty="0" err="1">
+                <a:solidFill>
+                  <a:srgbClr val="64748B"/>
+                </a:solidFill>
+                <a:latin typeface="Microsoft YaHei"/>
+                <a:ea typeface="Microsoft YaHei"/>
+                <a:cs typeface="Microsoft YaHei"/>
+              </a:rPr>
+              <a:t>多核移植实现</a:t>
+            </a:r>
+            <a:r>
+              <a:rPr sz="1050" dirty="0">
+                <a:solidFill>
+                  <a:srgbClr val="64748B"/>
+                </a:solidFill>
+                <a:latin typeface="Microsoft YaHei"/>
+                <a:ea typeface="Microsoft YaHei"/>
+                <a:cs typeface="Microsoft YaHei"/>
+              </a:rPr>
+              <a:t> / 11</a:t>
             </a:r>
           </a:p>
         </p:txBody>
@@ -6162,7 +6582,7 @@
               </a:defRPr>
             </a:pPr>
             <a:r>
-              <a:rPr sz="1200" b="1">
+              <a:rPr sz="1200" b="1" dirty="0">
                 <a:solidFill>
                   <a:srgbClr val="0F766E"/>
                 </a:solidFill>
@@ -6170,7 +6590,7 @@
                 <a:ea typeface="Microsoft YaHei"/>
                 <a:cs typeface="Microsoft YaHei"/>
               </a:rPr>
-              <a:t>MOS SMP DEFENSE</a:t>
+              <a:t>MOS SMP</a:t>
             </a:r>
           </a:p>
         </p:txBody>
@@ -6222,15 +6642,26 @@
               </a:defRPr>
             </a:pPr>
             <a:r>
-              <a:rPr sz="3450" b="1">
-                <a:solidFill>
-                  <a:srgbClr val="0F172A"/>
-                </a:solidFill>
-                <a:latin typeface="Microsoft YaHei"/>
-                <a:ea typeface="Microsoft YaHei"/>
-                <a:cs typeface="Microsoft YaHei"/>
-              </a:rPr>
-              <a:t>演示验证：双核启动与 IPI</a:t>
+              <a:rPr sz="3450" b="1" dirty="0" err="1">
+                <a:solidFill>
+                  <a:srgbClr val="0F172A"/>
+                </a:solidFill>
+                <a:latin typeface="Microsoft YaHei"/>
+                <a:ea typeface="Microsoft YaHei"/>
+                <a:cs typeface="Microsoft YaHei"/>
+              </a:rPr>
+              <a:t>验证：双核启动与</a:t>
+            </a:r>
+            <a:r>
+              <a:rPr sz="3450" b="1" dirty="0">
+                <a:solidFill>
+                  <a:srgbClr val="0F172A"/>
+                </a:solidFill>
+                <a:latin typeface="Microsoft YaHei"/>
+                <a:ea typeface="Microsoft YaHei"/>
+                <a:cs typeface="Microsoft YaHei"/>
+              </a:rPr>
+              <a:t> IPI</a:t>
             </a:r>
           </a:p>
         </p:txBody>
@@ -6477,7 +6908,7 @@
                 <a:ea typeface="Microsoft YaHei"/>
                 <a:cs typeface="Microsoft YaHei"/>
               </a:rPr>
-              <a:t>展示从核上线后，CPU0 </a:t>
+              <a:t>从核上线后，CPU0 </a:t>
             </a:r>
             <a:r>
               <a:rPr sz="1575" dirty="0" err="1">
@@ -6682,7 +7113,7 @@
               </a:defRPr>
             </a:pPr>
             <a:r>
-              <a:rPr sz="1050">
+              <a:rPr sz="1050" dirty="0">
                 <a:solidFill>
                   <a:srgbClr val="64748B"/>
                 </a:solidFill>
@@ -6690,7 +7121,29 @@
                 <a:ea typeface="Microsoft YaHei"/>
                 <a:cs typeface="Microsoft YaHei"/>
               </a:rPr>
-              <a:t>SMP 多核移植实现答辩 / 12</a:t>
+              <a:t>SMP </a:t>
+            </a:r>
+            <a:r>
+              <a:rPr sz="1050" dirty="0" err="1">
+                <a:solidFill>
+                  <a:srgbClr val="64748B"/>
+                </a:solidFill>
+                <a:latin typeface="Microsoft YaHei"/>
+                <a:ea typeface="Microsoft YaHei"/>
+                <a:cs typeface="Microsoft YaHei"/>
+              </a:rPr>
+              <a:t>多核移植实现</a:t>
+            </a:r>
+            <a:r>
+              <a:rPr sz="1050" dirty="0">
+                <a:solidFill>
+                  <a:srgbClr val="64748B"/>
+                </a:solidFill>
+                <a:latin typeface="Microsoft YaHei"/>
+                <a:ea typeface="Microsoft YaHei"/>
+                <a:cs typeface="Microsoft YaHei"/>
+              </a:rPr>
+              <a:t> / 12</a:t>
             </a:r>
           </a:p>
         </p:txBody>
@@ -6772,7 +7225,7 @@
               </a:defRPr>
             </a:pPr>
             <a:r>
-              <a:rPr sz="1200" b="1">
+              <a:rPr sz="1200" b="1" dirty="0">
                 <a:solidFill>
                   <a:srgbClr val="0F766E"/>
                 </a:solidFill>
@@ -6780,7 +7233,7 @@
                 <a:ea typeface="Microsoft YaHei"/>
                 <a:cs typeface="Microsoft YaHei"/>
               </a:rPr>
-              <a:t>MOS SMP DEFENSE</a:t>
+              <a:t>MOS SMP</a:t>
             </a:r>
           </a:p>
         </p:txBody>
@@ -6832,15 +7285,26 @@
               </a:defRPr>
             </a:pPr>
             <a:r>
-              <a:rPr sz="3450" b="1">
-                <a:solidFill>
-                  <a:srgbClr val="0F172A"/>
-                </a:solidFill>
-                <a:latin typeface="Microsoft YaHei"/>
-                <a:ea typeface="Microsoft YaHei"/>
-                <a:cs typeface="Microsoft YaHei"/>
-              </a:rPr>
-              <a:t>演示验证：双核启动与 IPI</a:t>
+              <a:rPr sz="3450" b="1" dirty="0" err="1">
+                <a:solidFill>
+                  <a:srgbClr val="0F172A"/>
+                </a:solidFill>
+                <a:latin typeface="Microsoft YaHei"/>
+                <a:ea typeface="Microsoft YaHei"/>
+                <a:cs typeface="Microsoft YaHei"/>
+              </a:rPr>
+              <a:t>验证：双核启动与</a:t>
+            </a:r>
+            <a:r>
+              <a:rPr sz="3450" b="1" dirty="0">
+                <a:solidFill>
+                  <a:srgbClr val="0F172A"/>
+                </a:solidFill>
+                <a:latin typeface="Microsoft YaHei"/>
+                <a:ea typeface="Microsoft YaHei"/>
+                <a:cs typeface="Microsoft YaHei"/>
+              </a:rPr>
+              <a:t> IPI</a:t>
             </a:r>
           </a:p>
         </p:txBody>
@@ -7095,7 +7559,7 @@
                 <a:ea typeface="Microsoft YaHei"/>
                 <a:cs typeface="Microsoft YaHei"/>
               </a:rPr>
-              <a:t>展示从核上线后，CPU0 </a:t>
+              <a:t>从核上线后，CPU0 </a:t>
             </a:r>
             <a:r>
               <a:rPr sz="1575" dirty="0" err="1">
@@ -7300,7 +7764,7 @@
               </a:defRPr>
             </a:pPr>
             <a:r>
-              <a:rPr sz="1050">
+              <a:rPr sz="1050" dirty="0">
                 <a:solidFill>
                   <a:srgbClr val="64748B"/>
                 </a:solidFill>
@@ -7308,7 +7772,29 @@
                 <a:ea typeface="Microsoft YaHei"/>
                 <a:cs typeface="Microsoft YaHei"/>
               </a:rPr>
-              <a:t>SMP 多核移植实现答辩 / 12</a:t>
+              <a:t>SMP </a:t>
+            </a:r>
+            <a:r>
+              <a:rPr sz="1050" dirty="0" err="1">
+                <a:solidFill>
+                  <a:srgbClr val="64748B"/>
+                </a:solidFill>
+                <a:latin typeface="Microsoft YaHei"/>
+                <a:ea typeface="Microsoft YaHei"/>
+                <a:cs typeface="Microsoft YaHei"/>
+              </a:rPr>
+              <a:t>多核移植实现</a:t>
+            </a:r>
+            <a:r>
+              <a:rPr sz="1050" dirty="0">
+                <a:solidFill>
+                  <a:srgbClr val="64748B"/>
+                </a:solidFill>
+                <a:latin typeface="Microsoft YaHei"/>
+                <a:ea typeface="Microsoft YaHei"/>
+                <a:cs typeface="Microsoft YaHei"/>
+              </a:rPr>
+              <a:t> / 12</a:t>
             </a:r>
           </a:p>
         </p:txBody>
@@ -7398,7 +7884,7 @@
               </a:defRPr>
             </a:pPr>
             <a:r>
-              <a:rPr sz="1200" b="1">
+              <a:rPr sz="1200" b="1" dirty="0">
                 <a:solidFill>
                   <a:srgbClr val="0F766E"/>
                 </a:solidFill>
@@ -7406,7 +7892,7 @@
                 <a:ea typeface="Microsoft YaHei"/>
                 <a:cs typeface="Microsoft YaHei"/>
               </a:rPr>
-              <a:t>MOS SMP DEFENSE</a:t>
+              <a:t>MOS SMP</a:t>
             </a:r>
           </a:p>
         </p:txBody>
@@ -7458,16 +7944,46 @@
               </a:defRPr>
             </a:pPr>
             <a:r>
-              <a:rPr sz="3450" b="1">
-                <a:solidFill>
-                  <a:srgbClr val="0F172A"/>
-                </a:solidFill>
-                <a:latin typeface="Microsoft YaHei"/>
-                <a:ea typeface="Microsoft YaHei"/>
-                <a:cs typeface="Microsoft YaHei"/>
-              </a:rPr>
-              <a:t>演示验证：调度与 SHELL 工作流</a:t>
-            </a:r>
+              <a:rPr sz="3450" b="1" dirty="0" err="1">
+                <a:solidFill>
+                  <a:srgbClr val="0F172A"/>
+                </a:solidFill>
+                <a:latin typeface="Microsoft YaHei"/>
+                <a:ea typeface="Microsoft YaHei"/>
+                <a:cs typeface="Microsoft YaHei"/>
+              </a:rPr>
+              <a:t>验证：调度与</a:t>
+            </a:r>
+            <a:r>
+              <a:rPr sz="3450" b="1" dirty="0">
+                <a:solidFill>
+                  <a:srgbClr val="0F172A"/>
+                </a:solidFill>
+                <a:latin typeface="Microsoft YaHei"/>
+                <a:ea typeface="Microsoft YaHei"/>
+                <a:cs typeface="Microsoft YaHei"/>
+              </a:rPr>
+              <a:t> SHELL </a:t>
+            </a:r>
+            <a:r>
+              <a:rPr sz="3450" b="1" dirty="0" err="1">
+                <a:solidFill>
+                  <a:srgbClr val="0F172A"/>
+                </a:solidFill>
+                <a:latin typeface="Microsoft YaHei"/>
+                <a:ea typeface="Microsoft YaHei"/>
+                <a:cs typeface="Microsoft YaHei"/>
+              </a:rPr>
+              <a:t>工作流</a:t>
+            </a:r>
+            <a:endParaRPr sz="3450" b="1" dirty="0">
+              <a:solidFill>
+                <a:srgbClr val="0F172A"/>
+              </a:solidFill>
+              <a:latin typeface="Microsoft YaHei"/>
+              <a:ea typeface="Microsoft YaHei"/>
+              <a:cs typeface="Microsoft YaHei"/>
+            </a:endParaRPr>
           </a:p>
         </p:txBody>
       </p:sp>
@@ -7782,7 +8298,7 @@
               </a:defRPr>
             </a:pPr>
             <a:r>
-              <a:rPr sz="1050">
+              <a:rPr sz="1050" dirty="0">
                 <a:solidFill>
                   <a:srgbClr val="64748B"/>
                 </a:solidFill>
@@ -7790,7 +8306,29 @@
                 <a:ea typeface="Microsoft YaHei"/>
                 <a:cs typeface="Microsoft YaHei"/>
               </a:rPr>
-              <a:t>SMP 多核移植实现答辩 / 13</a:t>
+              <a:t>SMP </a:t>
+            </a:r>
+            <a:r>
+              <a:rPr sz="1050" dirty="0" err="1">
+                <a:solidFill>
+                  <a:srgbClr val="64748B"/>
+                </a:solidFill>
+                <a:latin typeface="Microsoft YaHei"/>
+                <a:ea typeface="Microsoft YaHei"/>
+                <a:cs typeface="Microsoft YaHei"/>
+              </a:rPr>
+              <a:t>多核移植实现</a:t>
+            </a:r>
+            <a:r>
+              <a:rPr sz="1050" dirty="0">
+                <a:solidFill>
+                  <a:srgbClr val="64748B"/>
+                </a:solidFill>
+                <a:latin typeface="Microsoft YaHei"/>
+                <a:ea typeface="Microsoft YaHei"/>
+                <a:cs typeface="Microsoft YaHei"/>
+              </a:rPr>
+              <a:t> / 13</a:t>
             </a:r>
           </a:p>
         </p:txBody>
@@ -7872,7 +8410,7 @@
               </a:defRPr>
             </a:pPr>
             <a:r>
-              <a:rPr sz="1200" b="1">
+              <a:rPr sz="1200" b="1" dirty="0">
                 <a:solidFill>
                   <a:srgbClr val="0F766E"/>
                 </a:solidFill>
@@ -7880,7 +8418,7 @@
                 <a:ea typeface="Microsoft YaHei"/>
                 <a:cs typeface="Microsoft YaHei"/>
               </a:rPr>
-              <a:t>MOS SMP DEFENSE</a:t>
+              <a:t>MOS SMP</a:t>
             </a:r>
           </a:p>
         </p:txBody>
@@ -7932,16 +8470,46 @@
               </a:defRPr>
             </a:pPr>
             <a:r>
-              <a:rPr sz="3450" b="1">
-                <a:solidFill>
-                  <a:srgbClr val="0F172A"/>
-                </a:solidFill>
-                <a:latin typeface="Microsoft YaHei"/>
-                <a:ea typeface="Microsoft YaHei"/>
-                <a:cs typeface="Microsoft YaHei"/>
-              </a:rPr>
-              <a:t>演示验证：调度与 SHELL 工作流</a:t>
-            </a:r>
+              <a:rPr sz="3450" b="1" dirty="0" err="1">
+                <a:solidFill>
+                  <a:srgbClr val="0F172A"/>
+                </a:solidFill>
+                <a:latin typeface="Microsoft YaHei"/>
+                <a:ea typeface="Microsoft YaHei"/>
+                <a:cs typeface="Microsoft YaHei"/>
+              </a:rPr>
+              <a:t>验证：调度与</a:t>
+            </a:r>
+            <a:r>
+              <a:rPr sz="3450" b="1" dirty="0">
+                <a:solidFill>
+                  <a:srgbClr val="0F172A"/>
+                </a:solidFill>
+                <a:latin typeface="Microsoft YaHei"/>
+                <a:ea typeface="Microsoft YaHei"/>
+                <a:cs typeface="Microsoft YaHei"/>
+              </a:rPr>
+              <a:t> SHELL </a:t>
+            </a:r>
+            <a:r>
+              <a:rPr sz="3450" b="1" dirty="0" err="1">
+                <a:solidFill>
+                  <a:srgbClr val="0F172A"/>
+                </a:solidFill>
+                <a:latin typeface="Microsoft YaHei"/>
+                <a:ea typeface="Microsoft YaHei"/>
+                <a:cs typeface="Microsoft YaHei"/>
+              </a:rPr>
+              <a:t>工作流</a:t>
+            </a:r>
+            <a:endParaRPr sz="3450" b="1" dirty="0">
+              <a:solidFill>
+                <a:srgbClr val="0F172A"/>
+              </a:solidFill>
+              <a:latin typeface="Microsoft YaHei"/>
+              <a:ea typeface="Microsoft YaHei"/>
+              <a:cs typeface="Microsoft YaHei"/>
+            </a:endParaRPr>
           </a:p>
         </p:txBody>
       </p:sp>
@@ -8329,7 +8897,7 @@
               </a:defRPr>
             </a:pPr>
             <a:r>
-              <a:rPr sz="1200" b="1">
+              <a:rPr sz="1200" b="1" dirty="0">
                 <a:solidFill>
                   <a:srgbClr val="0F766E"/>
                 </a:solidFill>
@@ -8337,7 +8905,7 @@
                 <a:ea typeface="Microsoft YaHei"/>
                 <a:cs typeface="Microsoft YaHei"/>
               </a:rPr>
-              <a:t>MOS SMP DEFENSE</a:t>
+              <a:t>MOS SMP</a:t>
             </a:r>
           </a:p>
         </p:txBody>
@@ -8389,16 +8957,46 @@
               </a:defRPr>
             </a:pPr>
             <a:r>
-              <a:rPr sz="3450" b="1">
-                <a:solidFill>
-                  <a:srgbClr val="0F172A"/>
-                </a:solidFill>
-                <a:latin typeface="Microsoft YaHei"/>
-                <a:ea typeface="Microsoft YaHei"/>
-                <a:cs typeface="Microsoft YaHei"/>
-              </a:rPr>
-              <a:t>演示验证：远端 env 生命周期安全</a:t>
-            </a:r>
+              <a:rPr sz="3450" b="1" dirty="0" err="1">
+                <a:solidFill>
+                  <a:srgbClr val="0F172A"/>
+                </a:solidFill>
+                <a:latin typeface="Microsoft YaHei"/>
+                <a:ea typeface="Microsoft YaHei"/>
+                <a:cs typeface="Microsoft YaHei"/>
+              </a:rPr>
+              <a:t>验证：远端</a:t>
+            </a:r>
+            <a:r>
+              <a:rPr sz="3450" b="1" dirty="0">
+                <a:solidFill>
+                  <a:srgbClr val="0F172A"/>
+                </a:solidFill>
+                <a:latin typeface="Microsoft YaHei"/>
+                <a:ea typeface="Microsoft YaHei"/>
+                <a:cs typeface="Microsoft YaHei"/>
+              </a:rPr>
+              <a:t> env </a:t>
+            </a:r>
+            <a:r>
+              <a:rPr sz="3450" b="1" dirty="0" err="1">
+                <a:solidFill>
+                  <a:srgbClr val="0F172A"/>
+                </a:solidFill>
+                <a:latin typeface="Microsoft YaHei"/>
+                <a:ea typeface="Microsoft YaHei"/>
+                <a:cs typeface="Microsoft YaHei"/>
+              </a:rPr>
+              <a:t>生命周期安全</a:t>
+            </a:r>
+            <a:endParaRPr sz="3450" b="1" dirty="0">
+              <a:solidFill>
+                <a:srgbClr val="0F172A"/>
+              </a:solidFill>
+              <a:latin typeface="Microsoft YaHei"/>
+              <a:ea typeface="Microsoft YaHei"/>
+              <a:cs typeface="Microsoft YaHei"/>
+            </a:endParaRPr>
           </a:p>
         </p:txBody>
       </p:sp>
@@ -8959,7 +9557,7 @@
               </a:defRPr>
             </a:pPr>
             <a:r>
-              <a:rPr sz="1050">
+              <a:rPr sz="1050" dirty="0">
                 <a:solidFill>
                   <a:srgbClr val="64748B"/>
                 </a:solidFill>
@@ -8967,7 +9565,29 @@
                 <a:ea typeface="Microsoft YaHei"/>
                 <a:cs typeface="Microsoft YaHei"/>
               </a:rPr>
-              <a:t>SMP 多核移植实现答辩 / 14</a:t>
+              <a:t>SMP </a:t>
+            </a:r>
+            <a:r>
+              <a:rPr sz="1050" dirty="0" err="1">
+                <a:solidFill>
+                  <a:srgbClr val="64748B"/>
+                </a:solidFill>
+                <a:latin typeface="Microsoft YaHei"/>
+                <a:ea typeface="Microsoft YaHei"/>
+                <a:cs typeface="Microsoft YaHei"/>
+              </a:rPr>
+              <a:t>多核移植实现</a:t>
+            </a:r>
+            <a:r>
+              <a:rPr sz="1050" dirty="0">
+                <a:solidFill>
+                  <a:srgbClr val="64748B"/>
+                </a:solidFill>
+                <a:latin typeface="Microsoft YaHei"/>
+                <a:ea typeface="Microsoft YaHei"/>
+                <a:cs typeface="Microsoft YaHei"/>
+              </a:rPr>
+              <a:t> / 14</a:t>
             </a:r>
           </a:p>
         </p:txBody>
@@ -9057,7 +9677,7 @@
               </a:defRPr>
             </a:pPr>
             <a:r>
-              <a:rPr sz="1200" b="1">
+              <a:rPr sz="1200" b="1" dirty="0">
                 <a:solidFill>
                   <a:srgbClr val="0F766E"/>
                 </a:solidFill>
@@ -9065,7 +9685,7 @@
                 <a:ea typeface="Microsoft YaHei"/>
                 <a:cs typeface="Microsoft YaHei"/>
               </a:rPr>
-              <a:t>MOS SMP DEFENSE</a:t>
+              <a:t>MOS SMP</a:t>
             </a:r>
           </a:p>
         </p:txBody>
@@ -9739,7 +10359,7 @@
         <p:spPr>
           <a:xfrm>
             <a:off x="1504950" y="5257800"/>
-            <a:ext cx="9182100" cy="533400"/>
+            <a:ext cx="9182100" cy="800100"/>
           </a:xfrm>
           <a:prstGeom prst="roundRect">
             <a:avLst>
@@ -9804,15 +10424,116 @@
               </a:defRPr>
             </a:pPr>
             <a:r>
-              <a:rPr sz="1575">
-                <a:solidFill>
-                  <a:srgbClr val="0F172A"/>
-                </a:solidFill>
-                <a:latin typeface="Microsoft YaHei"/>
-                <a:ea typeface="Microsoft YaHei"/>
-                <a:cs typeface="Microsoft YaHei"/>
-              </a:rPr>
-              <a:t>共同修改区：include/smp.h、spinlock、mmu/trap 接口等先建接口再使用；共享文件按模块追加声明，避免重排造成冲突。</a:t>
+              <a:rPr sz="1575" dirty="0" err="1">
+                <a:solidFill>
+                  <a:srgbClr val="0F172A"/>
+                </a:solidFill>
+                <a:latin typeface="Microsoft YaHei"/>
+                <a:ea typeface="Microsoft YaHei"/>
+                <a:cs typeface="Microsoft YaHei"/>
+              </a:rPr>
+              <a:t>共同修改区：include</a:t>
+            </a:r>
+            <a:r>
+              <a:rPr sz="1575" dirty="0">
+                <a:solidFill>
+                  <a:srgbClr val="0F172A"/>
+                </a:solidFill>
+                <a:latin typeface="Microsoft YaHei"/>
+                <a:ea typeface="Microsoft YaHei"/>
+                <a:cs typeface="Microsoft YaHei"/>
+              </a:rPr>
+              <a:t>/</a:t>
+            </a:r>
+            <a:r>
+              <a:rPr sz="1575" dirty="0" err="1">
+                <a:solidFill>
+                  <a:srgbClr val="0F172A"/>
+                </a:solidFill>
+                <a:latin typeface="Microsoft YaHei"/>
+                <a:ea typeface="Microsoft YaHei"/>
+                <a:cs typeface="Microsoft YaHei"/>
+              </a:rPr>
+              <a:t>smp.h、spinlock、mmu</a:t>
+            </a:r>
+            <a:r>
+              <a:rPr sz="1575" dirty="0">
+                <a:solidFill>
+                  <a:srgbClr val="0F172A"/>
+                </a:solidFill>
+                <a:latin typeface="Microsoft YaHei"/>
+                <a:ea typeface="Microsoft YaHei"/>
+                <a:cs typeface="Microsoft YaHei"/>
+              </a:rPr>
+              <a:t>/trap </a:t>
+            </a:r>
+            <a:r>
+              <a:rPr sz="1575" dirty="0" err="1">
+                <a:solidFill>
+                  <a:srgbClr val="0F172A"/>
+                </a:solidFill>
+                <a:latin typeface="Microsoft YaHei"/>
+                <a:ea typeface="Microsoft YaHei"/>
+                <a:cs typeface="Microsoft YaHei"/>
+              </a:rPr>
+              <a:t>接口等先建接口再使用</a:t>
+            </a:r>
+            <a:r>
+              <a:rPr sz="1575" dirty="0">
+                <a:solidFill>
+                  <a:srgbClr val="0F172A"/>
+                </a:solidFill>
+                <a:latin typeface="Microsoft YaHei"/>
+                <a:ea typeface="Microsoft YaHei"/>
+                <a:cs typeface="Microsoft YaHei"/>
+              </a:rPr>
+              <a:t>；</a:t>
+            </a:r>
+            <a:endParaRPr lang="en-US" sz="1575" dirty="0">
+              <a:solidFill>
+                <a:srgbClr val="0F172A"/>
+              </a:solidFill>
+              <a:latin typeface="Microsoft YaHei"/>
+              <a:ea typeface="Microsoft YaHei"/>
+              <a:cs typeface="Microsoft YaHei"/>
+            </a:endParaRPr>
+          </a:p>
+          <a:p>
+            <a:pPr algn="ctr">
+              <a:lnSpc>
+                <a:spcPct val="108000"/>
+              </a:lnSpc>
+              <a:buNone/>
+              <a:defRPr sz="1575">
+                <a:solidFill>
+                  <a:srgbClr val="0F172A"/>
+                </a:solidFill>
+                <a:latin typeface="Microsoft YaHei"/>
+                <a:ea typeface="Microsoft YaHei"/>
+                <a:cs typeface="Microsoft YaHei"/>
+              </a:defRPr>
+            </a:pPr>
+            <a:r>
+              <a:rPr sz="1575" dirty="0" err="1">
+                <a:solidFill>
+                  <a:srgbClr val="0F172A"/>
+                </a:solidFill>
+                <a:latin typeface="Microsoft YaHei"/>
+                <a:ea typeface="Microsoft YaHei"/>
+                <a:cs typeface="Microsoft YaHei"/>
+              </a:rPr>
+              <a:t>共享文件按模块追加声明，避免重排造成冲突</a:t>
+            </a:r>
+            <a:r>
+              <a:rPr sz="1575" dirty="0">
+                <a:solidFill>
+                  <a:srgbClr val="0F172A"/>
+                </a:solidFill>
+                <a:latin typeface="Microsoft YaHei"/>
+                <a:ea typeface="Microsoft YaHei"/>
+                <a:cs typeface="Microsoft YaHei"/>
+              </a:rPr>
+              <a:t>。</a:t>
             </a:r>
           </a:p>
         </p:txBody>
@@ -9897,7 +10618,7 @@
               </a:defRPr>
             </a:pPr>
             <a:r>
-              <a:rPr sz="1050">
+              <a:rPr sz="1050" dirty="0">
                 <a:solidFill>
                   <a:srgbClr val="64748B"/>
                 </a:solidFill>
@@ -9905,7 +10626,29 @@
                 <a:ea typeface="Microsoft YaHei"/>
                 <a:cs typeface="Microsoft YaHei"/>
               </a:rPr>
-              <a:t>SMP 多核移植实现答辩 / 15</a:t>
+              <a:t>SMP </a:t>
+            </a:r>
+            <a:r>
+              <a:rPr sz="1050" dirty="0" err="1">
+                <a:solidFill>
+                  <a:srgbClr val="64748B"/>
+                </a:solidFill>
+                <a:latin typeface="Microsoft YaHei"/>
+                <a:ea typeface="Microsoft YaHei"/>
+                <a:cs typeface="Microsoft YaHei"/>
+              </a:rPr>
+              <a:t>多核移植实现</a:t>
+            </a:r>
+            <a:r>
+              <a:rPr sz="1050" dirty="0">
+                <a:solidFill>
+                  <a:srgbClr val="64748B"/>
+                </a:solidFill>
+                <a:latin typeface="Microsoft YaHei"/>
+                <a:ea typeface="Microsoft YaHei"/>
+                <a:cs typeface="Microsoft YaHei"/>
+              </a:rPr>
+              <a:t> / 15</a:t>
             </a:r>
           </a:p>
         </p:txBody>
@@ -9995,7 +10738,7 @@
               </a:defRPr>
             </a:pPr>
             <a:r>
-              <a:rPr sz="1200" b="1">
+              <a:rPr sz="1200" b="1" dirty="0">
                 <a:solidFill>
                   <a:srgbClr val="0F766E"/>
                 </a:solidFill>
@@ -10003,7 +10746,7 @@
                 <a:ea typeface="Microsoft YaHei"/>
                 <a:cs typeface="Microsoft YaHei"/>
               </a:rPr>
-              <a:t>MOS SMP DEFENSE</a:t>
+              <a:t>MOS SMP</a:t>
             </a:r>
           </a:p>
         </p:txBody>
@@ -10055,16 +10798,46 @@
               </a:defRPr>
             </a:pPr>
             <a:r>
-              <a:rPr sz="3450" b="1">
-                <a:solidFill>
-                  <a:srgbClr val="0F172A"/>
-                </a:solidFill>
-                <a:latin typeface="Microsoft YaHei"/>
-                <a:ea typeface="Microsoft YaHei"/>
-                <a:cs typeface="Microsoft YaHei"/>
-              </a:rPr>
-              <a:t>总结：实现语义完整，路线做了平台化取舍</a:t>
-            </a:r>
+              <a:rPr sz="3450" b="1" dirty="0" err="1">
+                <a:solidFill>
+                  <a:srgbClr val="0F172A"/>
+                </a:solidFill>
+                <a:latin typeface="Microsoft YaHei"/>
+                <a:ea typeface="Microsoft YaHei"/>
+                <a:cs typeface="Microsoft YaHei"/>
+              </a:rPr>
+              <a:t>总结：实现完整，路线</a:t>
+            </a:r>
+            <a:r>
+              <a:rPr lang="zh-CN" altLang="en-US" sz="3450" b="1" dirty="0">
+                <a:solidFill>
+                  <a:srgbClr val="0F172A"/>
+                </a:solidFill>
+                <a:latin typeface="Microsoft YaHei"/>
+                <a:ea typeface="Microsoft YaHei"/>
+                <a:cs typeface="Microsoft YaHei"/>
+              </a:rPr>
+              <a:t>有</a:t>
+            </a:r>
+            <a:r>
+              <a:rPr sz="3450" b="1" dirty="0" err="1">
+                <a:solidFill>
+                  <a:srgbClr val="0F172A"/>
+                </a:solidFill>
+                <a:latin typeface="Microsoft YaHei"/>
+                <a:ea typeface="Microsoft YaHei"/>
+                <a:cs typeface="Microsoft YaHei"/>
+              </a:rPr>
+              <a:t>平台化取舍</a:t>
+            </a:r>
+            <a:endParaRPr sz="3450" b="1" dirty="0">
+              <a:solidFill>
+                <a:srgbClr val="0F172A"/>
+              </a:solidFill>
+              <a:latin typeface="Microsoft YaHei"/>
+              <a:ea typeface="Microsoft YaHei"/>
+              <a:cs typeface="Microsoft YaHei"/>
+            </a:endParaRPr>
           </a:p>
         </p:txBody>
       </p:sp>
@@ -10331,16 +11104,68 @@
               </a:defRPr>
             </a:pPr>
             <a:r>
-              <a:rPr sz="2250" b="1">
-                <a:solidFill>
-                  <a:srgbClr val="0F172A"/>
-                </a:solidFill>
-                <a:latin typeface="Microsoft YaHei"/>
-                <a:ea typeface="Microsoft YaHei"/>
-                <a:cs typeface="Microsoft YaHei"/>
-              </a:rPr>
-              <a:t>答辩主线：不是照搬教程，而是在保持 SMP 语义的前提下适配 QEMU 平台与课程内核复杂度。</a:t>
-            </a:r>
+              <a:rPr lang="zh-CN" altLang="en-US" sz="2250" b="1" dirty="0">
+                <a:solidFill>
+                  <a:srgbClr val="0F172A"/>
+                </a:solidFill>
+                <a:latin typeface="Microsoft YaHei"/>
+                <a:ea typeface="Microsoft YaHei"/>
+                <a:cs typeface="Microsoft YaHei"/>
+              </a:rPr>
+              <a:t>在保持 </a:t>
+            </a:r>
+            <a:r>
+              <a:rPr sz="2250" b="1" dirty="0">
+                <a:solidFill>
+                  <a:srgbClr val="0F172A"/>
+                </a:solidFill>
+                <a:latin typeface="Microsoft YaHei"/>
+                <a:ea typeface="Microsoft YaHei"/>
+                <a:cs typeface="Microsoft YaHei"/>
+              </a:rPr>
+              <a:t>SMP </a:t>
+            </a:r>
+            <a:r>
+              <a:rPr sz="2250" b="1" dirty="0" err="1">
+                <a:solidFill>
+                  <a:srgbClr val="0F172A"/>
+                </a:solidFill>
+                <a:latin typeface="Microsoft YaHei"/>
+                <a:ea typeface="Microsoft YaHei"/>
+                <a:cs typeface="Microsoft YaHei"/>
+              </a:rPr>
+              <a:t>语义的前提下适配</a:t>
+            </a:r>
+            <a:r>
+              <a:rPr sz="2250" b="1" dirty="0">
+                <a:solidFill>
+                  <a:srgbClr val="0F172A"/>
+                </a:solidFill>
+                <a:latin typeface="Microsoft YaHei"/>
+                <a:ea typeface="Microsoft YaHei"/>
+                <a:cs typeface="Microsoft YaHei"/>
+              </a:rPr>
+              <a:t> QEMU </a:t>
+            </a:r>
+            <a:r>
+              <a:rPr sz="2250" b="1" dirty="0" err="1">
+                <a:solidFill>
+                  <a:srgbClr val="0F172A"/>
+                </a:solidFill>
+                <a:latin typeface="Microsoft YaHei"/>
+                <a:ea typeface="Microsoft YaHei"/>
+                <a:cs typeface="Microsoft YaHei"/>
+              </a:rPr>
+              <a:t>平台与课程内核复杂度</a:t>
+            </a:r>
+            <a:endParaRPr sz="2250" b="1" dirty="0">
+              <a:solidFill>
+                <a:srgbClr val="0F172A"/>
+              </a:solidFill>
+              <a:latin typeface="Microsoft YaHei"/>
+              <a:ea typeface="Microsoft YaHei"/>
+              <a:cs typeface="Microsoft YaHei"/>
+            </a:endParaRPr>
           </a:p>
         </p:txBody>
       </p:sp>
@@ -10424,7 +11249,7 @@
               </a:defRPr>
             </a:pPr>
             <a:r>
-              <a:rPr sz="1050">
+              <a:rPr sz="1050" dirty="0">
                 <a:solidFill>
                   <a:srgbClr val="64748B"/>
                 </a:solidFill>
@@ -10432,7 +11257,29 @@
                 <a:ea typeface="Microsoft YaHei"/>
                 <a:cs typeface="Microsoft YaHei"/>
               </a:rPr>
-              <a:t>SMP 多核移植实现答辩 / 16</a:t>
+              <a:t>SMP </a:t>
+            </a:r>
+            <a:r>
+              <a:rPr sz="1050" dirty="0" err="1">
+                <a:solidFill>
+                  <a:srgbClr val="64748B"/>
+                </a:solidFill>
+                <a:latin typeface="Microsoft YaHei"/>
+                <a:ea typeface="Microsoft YaHei"/>
+                <a:cs typeface="Microsoft YaHei"/>
+              </a:rPr>
+              <a:t>多核移植实现</a:t>
+            </a:r>
+            <a:r>
+              <a:rPr sz="1050" dirty="0">
+                <a:solidFill>
+                  <a:srgbClr val="64748B"/>
+                </a:solidFill>
+                <a:latin typeface="Microsoft YaHei"/>
+                <a:ea typeface="Microsoft YaHei"/>
+                <a:cs typeface="Microsoft YaHei"/>
+              </a:rPr>
+              <a:t> / 16</a:t>
             </a:r>
           </a:p>
         </p:txBody>
@@ -10522,7 +11369,7 @@
               </a:defRPr>
             </a:pPr>
             <a:r>
-              <a:rPr sz="1200" b="1">
+              <a:rPr sz="1200" b="1" dirty="0">
                 <a:solidFill>
                   <a:srgbClr val="0F766E"/>
                 </a:solidFill>
@@ -10530,7 +11377,7 @@
                 <a:ea typeface="Microsoft YaHei"/>
                 <a:cs typeface="Microsoft YaHei"/>
               </a:rPr>
-              <a:t>MOS SMP DEFENSE</a:t>
+              <a:t>MOS SMP</a:t>
             </a:r>
           </a:p>
         </p:txBody>
@@ -10822,7 +11669,7 @@
               </a:defRPr>
             </a:pPr>
             <a:r>
-              <a:rPr sz="1500">
+              <a:rPr sz="1500" dirty="0" err="1">
                 <a:solidFill>
                   <a:srgbClr val="64748B"/>
                 </a:solidFill>
@@ -10832,6 +11679,14 @@
               </a:rPr>
               <a:t>共享内核镜像</a:t>
             </a:r>
+            <a:endParaRPr sz="1500" dirty="0">
+              <a:solidFill>
+                <a:srgbClr val="64748B"/>
+              </a:solidFill>
+              <a:latin typeface="Microsoft YaHei"/>
+              <a:ea typeface="Microsoft YaHei"/>
+              <a:cs typeface="Microsoft YaHei"/>
+            </a:endParaRPr>
           </a:p>
         </p:txBody>
       </p:sp>
@@ -10882,7 +11737,7 @@
               </a:defRPr>
             </a:pPr>
             <a:r>
-              <a:rPr sz="3150" b="1">
+              <a:rPr sz="3150" b="1" dirty="0">
                 <a:solidFill>
                   <a:srgbClr val="7C3AED"/>
                 </a:solidFill>
@@ -10942,7 +11797,7 @@
               </a:defRPr>
             </a:pPr>
             <a:r>
-              <a:rPr sz="1500">
+              <a:rPr sz="1500" dirty="0" err="1">
                 <a:solidFill>
                   <a:srgbClr val="64748B"/>
                 </a:solidFill>
@@ -10950,8 +11805,38 @@
                 <a:ea typeface="Microsoft YaHei"/>
                 <a:cs typeface="Microsoft YaHei"/>
               </a:rPr>
-              <a:t>普通 env 多核调度</a:t>
-            </a:r>
+              <a:t>普通</a:t>
+            </a:r>
+            <a:r>
+              <a:rPr sz="1500" dirty="0">
+                <a:solidFill>
+                  <a:srgbClr val="64748B"/>
+                </a:solidFill>
+                <a:latin typeface="Microsoft YaHei"/>
+                <a:ea typeface="Microsoft YaHei"/>
+                <a:cs typeface="Microsoft YaHei"/>
+              </a:rPr>
+              <a:t> env </a:t>
+            </a:r>
+            <a:r>
+              <a:rPr sz="1500" dirty="0" err="1">
+                <a:solidFill>
+                  <a:srgbClr val="64748B"/>
+                </a:solidFill>
+                <a:latin typeface="Microsoft YaHei"/>
+                <a:ea typeface="Microsoft YaHei"/>
+                <a:cs typeface="Microsoft YaHei"/>
+              </a:rPr>
+              <a:t>多核调度</a:t>
+            </a:r>
+            <a:endParaRPr sz="1500" dirty="0">
+              <a:solidFill>
+                <a:srgbClr val="64748B"/>
+              </a:solidFill>
+              <a:latin typeface="Microsoft YaHei"/>
+              <a:ea typeface="Microsoft YaHei"/>
+              <a:cs typeface="Microsoft YaHei"/>
+            </a:endParaRPr>
           </a:p>
         </p:txBody>
       </p:sp>
@@ -11731,7 +12616,7 @@
               </a:defRPr>
             </a:pPr>
             <a:r>
-              <a:rPr sz="1050">
+              <a:rPr sz="1050" dirty="0">
                 <a:solidFill>
                   <a:srgbClr val="64748B"/>
                 </a:solidFill>
@@ -11739,7 +12624,29 @@
                 <a:ea typeface="Microsoft YaHei"/>
                 <a:cs typeface="Microsoft YaHei"/>
               </a:rPr>
-              <a:t>SMP 多核移植实现答辩 / 02</a:t>
+              <a:t>SMP </a:t>
+            </a:r>
+            <a:r>
+              <a:rPr sz="1050" dirty="0" err="1">
+                <a:solidFill>
+                  <a:srgbClr val="64748B"/>
+                </a:solidFill>
+                <a:latin typeface="Microsoft YaHei"/>
+                <a:ea typeface="Microsoft YaHei"/>
+                <a:cs typeface="Microsoft YaHei"/>
+              </a:rPr>
+              <a:t>多核移植实现</a:t>
+            </a:r>
+            <a:r>
+              <a:rPr sz="1050" dirty="0">
+                <a:solidFill>
+                  <a:srgbClr val="64748B"/>
+                </a:solidFill>
+                <a:latin typeface="Microsoft YaHei"/>
+                <a:ea typeface="Microsoft YaHei"/>
+                <a:cs typeface="Microsoft YaHei"/>
+              </a:rPr>
+              <a:t> / 02</a:t>
             </a:r>
           </a:p>
         </p:txBody>
@@ -11829,7 +12736,7 @@
               </a:defRPr>
             </a:pPr>
             <a:r>
-              <a:rPr sz="1200" b="1">
+              <a:rPr sz="1200" b="1" dirty="0">
                 <a:solidFill>
                   <a:srgbClr val="0F766E"/>
                 </a:solidFill>
@@ -11837,7 +12744,7 @@
                 <a:ea typeface="Microsoft YaHei"/>
                 <a:cs typeface="Microsoft YaHei"/>
               </a:rPr>
-              <a:t>MOS SMP DEFENSE</a:t>
+              <a:t>MOS SMP</a:t>
             </a:r>
           </a:p>
         </p:txBody>
@@ -12024,66 +12931,6 @@
       </p:sp>
       <p:sp>
         <p:nvSpPr>
-          <p:cNvPr id="5" name="矩形 4">
-            <a:extLst>
-              <a:ext uri="{FF2B5EF4-FFF2-40B4-BE49-F238E27FC236}">
-                <a16:creationId xmlns:a16="http://schemas.microsoft.com/office/drawing/2014/main" id="{B36D9B14-F2BF-4664-BB01-A77E51D67C14}"/>
-              </a:ext>
-            </a:extLst>
-          </p:cNvPr>
-          <p:cNvSpPr>
-            <a:spLocks noGrp="1"/>
-          </p:cNvSpPr>
-          <p:nvPr/>
-        </p:nvSpPr>
-        <p:spPr>
-          <a:xfrm>
-            <a:off x="6705600" y="1695450"/>
-            <a:ext cx="4362450" cy="304800"/>
-          </a:xfrm>
-          <a:prstGeom prst="rect">
-            <a:avLst/>
-          </a:prstGeom>
-          <a:noFill/>
-          <a:ln w="0">
-            <a:noFill/>
-            <a:prstDash val="solid"/>
-          </a:ln>
-        </p:spPr>
-        <p:txBody>
-          <a:bodyPr wrap="square" lIns="0" tIns="0" rIns="0" bIns="0" anchor="t"/>
-          <a:lstStyle/>
-          <a:p>
-            <a:pPr algn="l">
-              <a:lnSpc>
-                <a:spcPct val="108000"/>
-              </a:lnSpc>
-              <a:buNone/>
-              <a:defRPr sz="1350" b="1">
-                <a:solidFill>
-                  <a:srgbClr val="0F766E"/>
-                </a:solidFill>
-                <a:latin typeface="Microsoft YaHei"/>
-                <a:ea typeface="Microsoft YaHei"/>
-                <a:cs typeface="Microsoft YaHei"/>
-              </a:defRPr>
-            </a:pPr>
-            <a:r>
-              <a:rPr sz="1350" b="1">
-                <a:solidFill>
-                  <a:srgbClr val="0F766E"/>
-                </a:solidFill>
-                <a:latin typeface="Microsoft YaHei"/>
-                <a:ea typeface="Microsoft YaHei"/>
-                <a:cs typeface="Microsoft YaHei"/>
-              </a:rPr>
-              <a:t>答辩重点</a:t>
-            </a:r>
-          </a:p>
-        </p:txBody>
-      </p:sp>
-      <p:sp>
-        <p:nvSpPr>
           <p:cNvPr id="6" name="矩形 5">
             <a:extLst>
               <a:ext uri="{FF2B5EF4-FFF2-40B4-BE49-F238E27FC236}">
@@ -13217,7 +14064,7 @@
               </a:defRPr>
             </a:pPr>
             <a:r>
-              <a:rPr sz="1050">
+              <a:rPr sz="1050" dirty="0">
                 <a:solidFill>
                   <a:srgbClr val="64748B"/>
                 </a:solidFill>
@@ -13225,7 +14072,29 @@
                 <a:ea typeface="Microsoft YaHei"/>
                 <a:cs typeface="Microsoft YaHei"/>
               </a:rPr>
-              <a:t>SMP 多核移植实现答辩 / 03</a:t>
+              <a:t>SMP </a:t>
+            </a:r>
+            <a:r>
+              <a:rPr sz="1050" dirty="0" err="1">
+                <a:solidFill>
+                  <a:srgbClr val="64748B"/>
+                </a:solidFill>
+                <a:latin typeface="Microsoft YaHei"/>
+                <a:ea typeface="Microsoft YaHei"/>
+                <a:cs typeface="Microsoft YaHei"/>
+              </a:rPr>
+              <a:t>多核移植实现</a:t>
+            </a:r>
+            <a:r>
+              <a:rPr sz="1050" dirty="0">
+                <a:solidFill>
+                  <a:srgbClr val="64748B"/>
+                </a:solidFill>
+                <a:latin typeface="Microsoft YaHei"/>
+                <a:ea typeface="Microsoft YaHei"/>
+                <a:cs typeface="Microsoft YaHei"/>
+              </a:rPr>
+              <a:t> / 03</a:t>
             </a:r>
           </a:p>
         </p:txBody>
@@ -13315,7 +14184,7 @@
               </a:defRPr>
             </a:pPr>
             <a:r>
-              <a:rPr sz="1200" b="1">
+              <a:rPr sz="1200" b="1" dirty="0">
                 <a:solidFill>
                   <a:srgbClr val="0F766E"/>
                 </a:solidFill>
@@ -13323,7 +14192,7 @@
                 <a:ea typeface="Microsoft YaHei"/>
                 <a:cs typeface="Microsoft YaHei"/>
               </a:rPr>
-              <a:t>MOS SMP DEFENSE</a:t>
+              <a:t>MOS SMP</a:t>
             </a:r>
           </a:p>
         </p:txBody>
@@ -14560,7 +15429,7 @@
               </a:defRPr>
             </a:pPr>
             <a:r>
-              <a:rPr sz="1050">
+              <a:rPr sz="1050" dirty="0">
                 <a:solidFill>
                   <a:srgbClr val="64748B"/>
                 </a:solidFill>
@@ -14568,7 +15437,29 @@
                 <a:ea typeface="Microsoft YaHei"/>
                 <a:cs typeface="Microsoft YaHei"/>
               </a:rPr>
-              <a:t>SMP 多核移植实现答辩 / 04</a:t>
+              <a:t>SMP </a:t>
+            </a:r>
+            <a:r>
+              <a:rPr sz="1050" dirty="0" err="1">
+                <a:solidFill>
+                  <a:srgbClr val="64748B"/>
+                </a:solidFill>
+                <a:latin typeface="Microsoft YaHei"/>
+                <a:ea typeface="Microsoft YaHei"/>
+                <a:cs typeface="Microsoft YaHei"/>
+              </a:rPr>
+              <a:t>多核移植实现</a:t>
+            </a:r>
+            <a:r>
+              <a:rPr sz="1050" dirty="0">
+                <a:solidFill>
+                  <a:srgbClr val="64748B"/>
+                </a:solidFill>
+                <a:latin typeface="Microsoft YaHei"/>
+                <a:ea typeface="Microsoft YaHei"/>
+                <a:cs typeface="Microsoft YaHei"/>
+              </a:rPr>
+              <a:t> / 04</a:t>
             </a:r>
           </a:p>
         </p:txBody>
@@ -14658,7 +15549,7 @@
               </a:defRPr>
             </a:pPr>
             <a:r>
-              <a:rPr sz="1200" b="1">
+              <a:rPr sz="1200" b="1" dirty="0">
                 <a:solidFill>
                   <a:srgbClr val="0F766E"/>
                 </a:solidFill>
@@ -14666,7 +15557,7 @@
                 <a:ea typeface="Microsoft YaHei"/>
                 <a:cs typeface="Microsoft YaHei"/>
               </a:rPr>
-              <a:t>MOS SMP DEFENSE</a:t>
+              <a:t>MOS SMP</a:t>
             </a:r>
           </a:p>
         </p:txBody>
@@ -16353,7 +17244,7 @@
               </a:defRPr>
             </a:pPr>
             <a:r>
-              <a:rPr sz="1050">
+              <a:rPr sz="1050" dirty="0">
                 <a:solidFill>
                   <a:srgbClr val="64748B"/>
                 </a:solidFill>
@@ -16361,7 +17252,29 @@
                 <a:ea typeface="Microsoft YaHei"/>
                 <a:cs typeface="Microsoft YaHei"/>
               </a:rPr>
-              <a:t>SMP 多核移植实现答辩 / 05</a:t>
+              <a:t>SMP </a:t>
+            </a:r>
+            <a:r>
+              <a:rPr sz="1050" dirty="0" err="1">
+                <a:solidFill>
+                  <a:srgbClr val="64748B"/>
+                </a:solidFill>
+                <a:latin typeface="Microsoft YaHei"/>
+                <a:ea typeface="Microsoft YaHei"/>
+                <a:cs typeface="Microsoft YaHei"/>
+              </a:rPr>
+              <a:t>多核移植实现</a:t>
+            </a:r>
+            <a:r>
+              <a:rPr sz="1050" dirty="0">
+                <a:solidFill>
+                  <a:srgbClr val="64748B"/>
+                </a:solidFill>
+                <a:latin typeface="Microsoft YaHei"/>
+                <a:ea typeface="Microsoft YaHei"/>
+                <a:cs typeface="Microsoft YaHei"/>
+              </a:rPr>
+              <a:t> / 05</a:t>
             </a:r>
           </a:p>
         </p:txBody>
@@ -16451,7 +17364,7 @@
               </a:defRPr>
             </a:pPr>
             <a:r>
-              <a:rPr sz="1200" b="1">
+              <a:rPr sz="1200" b="1" dirty="0">
                 <a:solidFill>
                   <a:srgbClr val="0F766E"/>
                 </a:solidFill>
@@ -16459,7 +17372,7 @@
                 <a:ea typeface="Microsoft YaHei"/>
                 <a:cs typeface="Microsoft YaHei"/>
               </a:rPr>
-              <a:t>MOS SMP DEFENSE</a:t>
+              <a:t>MOS SMP</a:t>
             </a:r>
           </a:p>
         </p:txBody>
@@ -17195,7 +18108,7 @@
               </a:defRPr>
             </a:pPr>
             <a:r>
-              <a:rPr sz="1200" b="0">
+              <a:rPr sz="1200" b="0" dirty="0" err="1">
                 <a:solidFill>
                   <a:srgbClr val="D6E3F0"/>
                 </a:solidFill>
@@ -17206,7 +18119,7 @@
               <a:t>spin_lock</a:t>
             </a:r>
             <a:r>
-              <a:rPr sz="1200" b="0">
+              <a:rPr sz="1200" b="0" dirty="0">
                 <a:solidFill>
                   <a:srgbClr val="CBD5E1"/>
                 </a:solidFill>
@@ -17217,7 +18130,7 @@
               <a:t>(&amp;</a:t>
             </a:r>
             <a:r>
-              <a:rPr sz="1200" b="0">
+              <a:rPr sz="1200" b="0" dirty="0" err="1">
                 <a:solidFill>
                   <a:srgbClr val="D6E3F0"/>
                 </a:solidFill>
@@ -17228,7 +18141,7 @@
               <a:t>ipi_mailbox_lock</a:t>
             </a:r>
             <a:r>
-              <a:rPr sz="1200" b="0">
+              <a:rPr sz="1200" b="0" dirty="0">
                 <a:solidFill>
                   <a:srgbClr val="CBD5E1"/>
                 </a:solidFill>
@@ -17239,7 +18152,7 @@
               <a:t>[</a:t>
             </a:r>
             <a:r>
-              <a:rPr sz="1200" b="0">
+              <a:rPr sz="1200" b="0" dirty="0" err="1">
                 <a:solidFill>
                   <a:srgbClr val="D6E3F0"/>
                 </a:solidFill>
@@ -17250,7 +18163,7 @@
               <a:t>cpu</a:t>
             </a:r>
             <a:r>
-              <a:rPr sz="1200" b="0">
+              <a:rPr sz="1200" b="0" dirty="0">
                 <a:solidFill>
                   <a:srgbClr val="CBD5E1"/>
                 </a:solidFill>
@@ -17274,7 +18187,7 @@
               </a:defRPr>
             </a:pPr>
             <a:r>
-              <a:rPr sz="1200" b="0">
+              <a:rPr sz="1200" b="0" dirty="0" err="1">
                 <a:solidFill>
                   <a:srgbClr val="D6E3F0"/>
                 </a:solidFill>
@@ -17285,7 +18198,7 @@
               <a:t>ipi_done</a:t>
             </a:r>
             <a:r>
-              <a:rPr sz="1200" b="0">
+              <a:rPr sz="1200" b="0" dirty="0">
                 <a:solidFill>
                   <a:srgbClr val="CBD5E1"/>
                 </a:solidFill>
@@ -17296,7 +18209,7 @@
               <a:t>[</a:t>
             </a:r>
             <a:r>
-              <a:rPr sz="1200" b="0">
+              <a:rPr sz="1200" b="0" dirty="0" err="1">
                 <a:solidFill>
                   <a:srgbClr val="D6E3F0"/>
                 </a:solidFill>
@@ -17307,7 +18220,7 @@
               <a:t>cpu</a:t>
             </a:r>
             <a:r>
-              <a:rPr sz="1200" b="0">
+              <a:rPr sz="1200" b="0" dirty="0">
                 <a:solidFill>
                   <a:srgbClr val="CBD5E1"/>
                 </a:solidFill>
@@ -17318,7 +18231,7 @@
               <a:t>]</a:t>
             </a:r>
             <a:r>
-              <a:rPr sz="1200" b="0">
+              <a:rPr sz="1200" b="0" dirty="0">
                 <a:solidFill>
                   <a:srgbClr val="D6E3F0"/>
                 </a:solidFill>
@@ -17329,7 +18242,7 @@
               <a:t> </a:t>
             </a:r>
             <a:r>
-              <a:rPr sz="1200" b="0">
+              <a:rPr sz="1200" b="0" dirty="0">
                 <a:solidFill>
                   <a:srgbClr val="CBD5E1"/>
                 </a:solidFill>
@@ -17340,7 +18253,7 @@
               <a:t>=</a:t>
             </a:r>
             <a:r>
-              <a:rPr sz="1200" b="0">
+              <a:rPr sz="1200" b="0" dirty="0">
                 <a:solidFill>
                   <a:srgbClr val="D6E3F0"/>
                 </a:solidFill>
@@ -17351,7 +18264,7 @@
               <a:t> </a:t>
             </a:r>
             <a:r>
-              <a:rPr sz="1200" b="0">
+              <a:rPr sz="1200" b="0" dirty="0">
                 <a:solidFill>
                   <a:srgbClr val="FBBF24"/>
                 </a:solidFill>
@@ -17362,7 +18275,7 @@
               <a:t>0</a:t>
             </a:r>
             <a:r>
-              <a:rPr sz="1200" b="0">
+              <a:rPr sz="1200" b="0" dirty="0">
                 <a:solidFill>
                   <a:srgbClr val="CBD5E1"/>
                 </a:solidFill>
@@ -17386,7 +18299,7 @@
               </a:defRPr>
             </a:pPr>
             <a:r>
-              <a:rPr sz="1200" b="0">
+              <a:rPr sz="1200" b="0" dirty="0" err="1">
                 <a:solidFill>
                   <a:srgbClr val="D6E3F0"/>
                 </a:solidFill>
@@ -17397,7 +18310,7 @@
               <a:t>ipi_mailbox_write</a:t>
             </a:r>
             <a:r>
-              <a:rPr sz="1200" b="0">
+              <a:rPr sz="1200" b="0" dirty="0">
                 <a:solidFill>
                   <a:srgbClr val="CBD5E1"/>
                 </a:solidFill>
@@ -17408,7 +18321,7 @@
               <a:t>(</a:t>
             </a:r>
             <a:r>
-              <a:rPr sz="1200" b="0">
+              <a:rPr sz="1200" b="0" dirty="0" err="1">
                 <a:solidFill>
                   <a:srgbClr val="D6E3F0"/>
                 </a:solidFill>
@@ -17419,7 +18332,7 @@
               <a:t>cpu</a:t>
             </a:r>
             <a:r>
-              <a:rPr sz="1200" b="0">
+              <a:rPr sz="1200" b="0" dirty="0">
                 <a:solidFill>
                   <a:srgbClr val="CBD5E1"/>
                 </a:solidFill>
@@ -17430,7 +18343,7 @@
               <a:t>,</a:t>
             </a:r>
             <a:r>
-              <a:rPr sz="1200" b="0">
+              <a:rPr sz="1200" b="0" dirty="0">
                 <a:solidFill>
                   <a:srgbClr val="D6E3F0"/>
                 </a:solidFill>
@@ -17441,7 +18354,7 @@
               <a:t> </a:t>
             </a:r>
             <a:r>
-              <a:rPr sz="1200" b="0">
+              <a:rPr sz="1200" b="0" dirty="0">
                 <a:solidFill>
                   <a:srgbClr val="F472B6"/>
                 </a:solidFill>
@@ -17452,7 +18365,7 @@
               <a:t>IPI_MBOX_FN</a:t>
             </a:r>
             <a:r>
-              <a:rPr sz="1200" b="0">
+              <a:rPr sz="1200" b="0" dirty="0">
                 <a:solidFill>
                   <a:srgbClr val="CBD5E1"/>
                 </a:solidFill>
@@ -17463,7 +18376,7 @@
               <a:t>,</a:t>
             </a:r>
             <a:r>
-              <a:rPr sz="1200" b="0">
+              <a:rPr sz="1200" b="0" dirty="0">
                 <a:solidFill>
                   <a:srgbClr val="D6E3F0"/>
                 </a:solidFill>
@@ -17474,7 +18387,7 @@
               <a:t> </a:t>
             </a:r>
             <a:r>
-              <a:rPr sz="1200" b="0">
+              <a:rPr sz="1200" b="0" dirty="0">
                 <a:solidFill>
                   <a:srgbClr val="CBD5E1"/>
                 </a:solidFill>
@@ -17485,7 +18398,7 @@
               <a:t>(</a:t>
             </a:r>
             <a:r>
-              <a:rPr sz="1200" b="1">
+              <a:rPr sz="1200" b="1" dirty="0" err="1">
                 <a:solidFill>
                   <a:srgbClr val="60A5FA"/>
                 </a:solidFill>
@@ -17496,7 +18409,7 @@
               <a:t>u_int</a:t>
             </a:r>
             <a:r>
-              <a:rPr sz="1200" b="0">
+              <a:rPr sz="1200" b="0" dirty="0">
                 <a:solidFill>
                   <a:srgbClr val="CBD5E1"/>
                 </a:solidFill>
@@ -17507,7 +18420,7 @@
               <a:t>)</a:t>
             </a:r>
             <a:r>
-              <a:rPr sz="1200" b="0">
+              <a:rPr sz="1200" b="0" dirty="0" err="1">
                 <a:solidFill>
                   <a:srgbClr val="D6E3F0"/>
                 </a:solidFill>
@@ -17518,7 +18431,7 @@
               <a:t>fn</a:t>
             </a:r>
             <a:r>
-              <a:rPr sz="1200" b="0">
+              <a:rPr sz="1200" b="0" dirty="0">
                 <a:solidFill>
                   <a:srgbClr val="CBD5E1"/>
                 </a:solidFill>
@@ -17542,7 +18455,7 @@
               </a:defRPr>
             </a:pPr>
             <a:r>
-              <a:rPr sz="1200" b="0">
+              <a:rPr sz="1200" b="0" dirty="0" err="1">
                 <a:solidFill>
                   <a:srgbClr val="D6E3F0"/>
                 </a:solidFill>
@@ -17553,7 +18466,7 @@
               <a:t>ipi_send</a:t>
             </a:r>
             <a:r>
-              <a:rPr sz="1200" b="0">
+              <a:rPr sz="1200" b="0" dirty="0">
                 <a:solidFill>
                   <a:srgbClr val="CBD5E1"/>
                 </a:solidFill>
@@ -17564,7 +18477,7 @@
               <a:t>(</a:t>
             </a:r>
             <a:r>
-              <a:rPr sz="1200" b="0">
+              <a:rPr sz="1200" b="0" dirty="0" err="1">
                 <a:solidFill>
                   <a:srgbClr val="D6E3F0"/>
                 </a:solidFill>
@@ -17575,7 +18488,7 @@
               <a:t>cpu</a:t>
             </a:r>
             <a:r>
-              <a:rPr sz="1200" b="0">
+              <a:rPr sz="1200" b="0" dirty="0">
                 <a:solidFill>
                   <a:srgbClr val="CBD5E1"/>
                 </a:solidFill>
@@ -17586,7 +18499,7 @@
               <a:t>,</a:t>
             </a:r>
             <a:r>
-              <a:rPr sz="1200" b="0">
+              <a:rPr sz="1200" b="0" dirty="0">
                 <a:solidFill>
                   <a:srgbClr val="D6E3F0"/>
                 </a:solidFill>
@@ -17597,7 +18510,7 @@
               <a:t> </a:t>
             </a:r>
             <a:r>
-              <a:rPr sz="1200" b="0">
+              <a:rPr sz="1200" b="0" dirty="0">
                 <a:solidFill>
                   <a:srgbClr val="F472B6"/>
                 </a:solidFill>
@@ -17608,7 +18521,7 @@
               <a:t>IPI_CALL</a:t>
             </a:r>
             <a:r>
-              <a:rPr sz="1200" b="0">
+              <a:rPr sz="1200" b="0" dirty="0">
                 <a:solidFill>
                   <a:srgbClr val="CBD5E1"/>
                 </a:solidFill>
@@ -17632,7 +18545,7 @@
               </a:defRPr>
             </a:pPr>
             <a:r>
-              <a:rPr sz="1200" b="0">
+              <a:rPr sz="1200" b="0" dirty="0" err="1">
                 <a:solidFill>
                   <a:srgbClr val="D6E3F0"/>
                 </a:solidFill>
@@ -17643,7 +18556,7 @@
               <a:t>ipi_wait_done</a:t>
             </a:r>
             <a:r>
-              <a:rPr sz="1200" b="0">
+              <a:rPr sz="1200" b="0" dirty="0">
                 <a:solidFill>
                   <a:srgbClr val="CBD5E1"/>
                 </a:solidFill>
@@ -17654,7 +18567,7 @@
               <a:t>(</a:t>
             </a:r>
             <a:r>
-              <a:rPr sz="1200" b="0">
+              <a:rPr sz="1200" b="0" dirty="0" err="1">
                 <a:solidFill>
                   <a:srgbClr val="D6E3F0"/>
                 </a:solidFill>
@@ -17665,7 +18578,7 @@
               <a:t>cpu</a:t>
             </a:r>
             <a:r>
-              <a:rPr sz="1200" b="0">
+              <a:rPr sz="1200" b="0" dirty="0">
                 <a:solidFill>
                   <a:srgbClr val="CBD5E1"/>
                 </a:solidFill>
@@ -17689,7 +18602,7 @@
               </a:defRPr>
             </a:pPr>
             <a:r>
-              <a:rPr sz="1200" b="0">
+              <a:rPr sz="1200" b="0" dirty="0" err="1">
                 <a:solidFill>
                   <a:srgbClr val="D6E3F0"/>
                 </a:solidFill>
@@ -17700,7 +18613,7 @@
               <a:t>spin_unlock</a:t>
             </a:r>
             <a:r>
-              <a:rPr sz="1200" b="0">
+              <a:rPr sz="1200" b="0" dirty="0">
                 <a:solidFill>
                   <a:srgbClr val="CBD5E1"/>
                 </a:solidFill>
@@ -17711,7 +18624,7 @@
               <a:t>(&amp;</a:t>
             </a:r>
             <a:r>
-              <a:rPr sz="1200" b="0">
+              <a:rPr sz="1200" b="0" dirty="0" err="1">
                 <a:solidFill>
                   <a:srgbClr val="D6E3F0"/>
                 </a:solidFill>
@@ -17722,7 +18635,7 @@
               <a:t>ipi_mailbox_lock</a:t>
             </a:r>
             <a:r>
-              <a:rPr sz="1200" b="0">
+              <a:rPr sz="1200" b="0" dirty="0">
                 <a:solidFill>
                   <a:srgbClr val="CBD5E1"/>
                 </a:solidFill>
@@ -17733,7 +18646,7 @@
               <a:t>[</a:t>
             </a:r>
             <a:r>
-              <a:rPr sz="1200" b="0">
+              <a:rPr sz="1200" b="0" dirty="0" err="1">
                 <a:solidFill>
                   <a:srgbClr val="D6E3F0"/>
                 </a:solidFill>
@@ -17744,7 +18657,7 @@
               <a:t>cpu</a:t>
             </a:r>
             <a:r>
-              <a:rPr sz="1200" b="0">
+              <a:rPr sz="1200" b="0" dirty="0">
                 <a:solidFill>
                   <a:srgbClr val="CBD5E1"/>
                 </a:solidFill>
@@ -17837,7 +18750,7 @@
               </a:defRPr>
             </a:pPr>
             <a:r>
-              <a:rPr sz="1050">
+              <a:rPr sz="1050" dirty="0">
                 <a:solidFill>
                   <a:srgbClr val="64748B"/>
                 </a:solidFill>
@@ -17845,7 +18758,29 @@
                 <a:ea typeface="Microsoft YaHei"/>
                 <a:cs typeface="Microsoft YaHei"/>
               </a:rPr>
-              <a:t>SMP 多核移植实现答辩 / 06</a:t>
+              <a:t>SMP </a:t>
+            </a:r>
+            <a:r>
+              <a:rPr sz="1050" dirty="0" err="1">
+                <a:solidFill>
+                  <a:srgbClr val="64748B"/>
+                </a:solidFill>
+                <a:latin typeface="Microsoft YaHei"/>
+                <a:ea typeface="Microsoft YaHei"/>
+                <a:cs typeface="Microsoft YaHei"/>
+              </a:rPr>
+              <a:t>多核移植实现</a:t>
+            </a:r>
+            <a:r>
+              <a:rPr sz="1050" dirty="0">
+                <a:solidFill>
+                  <a:srgbClr val="64748B"/>
+                </a:solidFill>
+                <a:latin typeface="Microsoft YaHei"/>
+                <a:ea typeface="Microsoft YaHei"/>
+                <a:cs typeface="Microsoft YaHei"/>
+              </a:rPr>
+              <a:t> / 06</a:t>
             </a:r>
           </a:p>
         </p:txBody>
@@ -17935,7 +18870,7 @@
               </a:defRPr>
             </a:pPr>
             <a:r>
-              <a:rPr sz="1200" b="1">
+              <a:rPr sz="1200" b="1" dirty="0">
                 <a:solidFill>
                   <a:srgbClr val="0F766E"/>
                 </a:solidFill>
@@ -17943,7 +18878,7 @@
                 <a:ea typeface="Microsoft YaHei"/>
                 <a:cs typeface="Microsoft YaHei"/>
               </a:rPr>
-              <a:t>MOS SMP DEFENSE</a:t>
+              <a:t>MOS SMP</a:t>
             </a:r>
           </a:p>
         </p:txBody>
@@ -17995,16 +18930,35 @@
               </a:defRPr>
             </a:pPr>
             <a:r>
-              <a:rPr sz="3450" b="1">
-                <a:solidFill>
-                  <a:srgbClr val="0F172A"/>
-                </a:solidFill>
-                <a:latin typeface="Microsoft YaHei"/>
-                <a:ea typeface="Microsoft YaHei"/>
-                <a:cs typeface="Microsoft YaHei"/>
-              </a:rPr>
-              <a:t>TLB shootdown：页表修改后广播失效</a:t>
-            </a:r>
+              <a:rPr sz="3450" b="1" dirty="0">
+                <a:solidFill>
+                  <a:srgbClr val="0F172A"/>
+                </a:solidFill>
+                <a:latin typeface="Microsoft YaHei"/>
+                <a:ea typeface="Microsoft YaHei"/>
+                <a:cs typeface="Microsoft YaHei"/>
+              </a:rPr>
+              <a:t>TLB </a:t>
+            </a:r>
+            <a:r>
+              <a:rPr sz="3450" b="1" dirty="0" err="1">
+                <a:solidFill>
+                  <a:srgbClr val="0F172A"/>
+                </a:solidFill>
+                <a:latin typeface="Microsoft YaHei"/>
+                <a:ea typeface="Microsoft YaHei"/>
+                <a:cs typeface="Microsoft YaHei"/>
+              </a:rPr>
+              <a:t>shootdown：页表修改后广播失效</a:t>
+            </a:r>
+            <a:endParaRPr sz="3450" b="1" dirty="0">
+              <a:solidFill>
+                <a:srgbClr val="0F172A"/>
+              </a:solidFill>
+              <a:latin typeface="Microsoft YaHei"/>
+              <a:ea typeface="Microsoft YaHei"/>
+              <a:cs typeface="Microsoft YaHei"/>
+            </a:endParaRPr>
           </a:p>
         </p:txBody>
       </p:sp>
@@ -18204,7 +19158,7 @@
               </a:defRPr>
             </a:pPr>
             <a:r>
-              <a:rPr sz="1500" b="1">
+              <a:rPr sz="1500" b="1" dirty="0" err="1">
                 <a:solidFill>
                   <a:srgbClr val="0F172A"/>
                 </a:solidFill>
@@ -18214,6 +19168,14 @@
               </a:rPr>
               <a:t>本地</a:t>
             </a:r>
+            <a:endParaRPr sz="1500" b="1" dirty="0">
+              <a:solidFill>
+                <a:srgbClr val="0F172A"/>
+              </a:solidFill>
+              <a:latin typeface="Microsoft YaHei"/>
+              <a:ea typeface="Microsoft YaHei"/>
+              <a:cs typeface="Microsoft YaHei"/>
+            </a:endParaRPr>
           </a:p>
           <a:p>
             <a:pPr algn="ctr">
@@ -18227,7 +19189,7 @@
               </a:defRPr>
             </a:pPr>
             <a:r>
-              <a:rPr sz="1500" b="1">
+              <a:rPr sz="1500" b="1" dirty="0">
                 <a:solidFill>
                   <a:srgbClr val="0F172A"/>
                 </a:solidFill>
@@ -19166,7 +20128,7 @@
               </a:defRPr>
             </a:pPr>
             <a:r>
-              <a:rPr sz="1050">
+              <a:rPr sz="1050" dirty="0">
                 <a:solidFill>
                   <a:srgbClr val="64748B"/>
                 </a:solidFill>
@@ -19174,7 +20136,29 @@
                 <a:ea typeface="Microsoft YaHei"/>
                 <a:cs typeface="Microsoft YaHei"/>
               </a:rPr>
-              <a:t>SMP 多核移植实现答辩 / 07</a:t>
+              <a:t>SMP </a:t>
+            </a:r>
+            <a:r>
+              <a:rPr sz="1050" dirty="0" err="1">
+                <a:solidFill>
+                  <a:srgbClr val="64748B"/>
+                </a:solidFill>
+                <a:latin typeface="Microsoft YaHei"/>
+                <a:ea typeface="Microsoft YaHei"/>
+                <a:cs typeface="Microsoft YaHei"/>
+              </a:rPr>
+              <a:t>多核移植实现</a:t>
+            </a:r>
+            <a:r>
+              <a:rPr sz="1050" dirty="0">
+                <a:solidFill>
+                  <a:srgbClr val="64748B"/>
+                </a:solidFill>
+                <a:latin typeface="Microsoft YaHei"/>
+                <a:ea typeface="Microsoft YaHei"/>
+                <a:cs typeface="Microsoft YaHei"/>
+              </a:rPr>
+              <a:t> / 07</a:t>
             </a:r>
           </a:p>
         </p:txBody>
@@ -19264,7 +20248,7 @@
               </a:defRPr>
             </a:pPr>
             <a:r>
-              <a:rPr sz="1200" b="1">
+              <a:rPr sz="1200" b="1" dirty="0">
                 <a:solidFill>
                   <a:srgbClr val="0F766E"/>
                 </a:solidFill>
@@ -19272,7 +20256,7 @@
                 <a:ea typeface="Microsoft YaHei"/>
                 <a:cs typeface="Microsoft YaHei"/>
               </a:rPr>
-              <a:t>MOS SMP DEFENSE</a:t>
+              <a:t>MOS SMP</a:t>
             </a:r>
           </a:p>
         </p:txBody>
@@ -20861,7 +21845,7 @@
               </a:defRPr>
             </a:pPr>
             <a:r>
-              <a:rPr sz="1050">
+              <a:rPr sz="1050" dirty="0">
                 <a:solidFill>
                   <a:srgbClr val="64748B"/>
                 </a:solidFill>
@@ -20869,7 +21853,29 @@
                 <a:ea typeface="Microsoft YaHei"/>
                 <a:cs typeface="Microsoft YaHei"/>
               </a:rPr>
-              <a:t>SMP 多核移植实现答辩 / 08</a:t>
+              <a:t>SMP </a:t>
+            </a:r>
+            <a:r>
+              <a:rPr sz="1050" dirty="0" err="1">
+                <a:solidFill>
+                  <a:srgbClr val="64748B"/>
+                </a:solidFill>
+                <a:latin typeface="Microsoft YaHei"/>
+                <a:ea typeface="Microsoft YaHei"/>
+                <a:cs typeface="Microsoft YaHei"/>
+              </a:rPr>
+              <a:t>多核移植实现</a:t>
+            </a:r>
+            <a:r>
+              <a:rPr sz="1050" dirty="0">
+                <a:solidFill>
+                  <a:srgbClr val="64748B"/>
+                </a:solidFill>
+                <a:latin typeface="Microsoft YaHei"/>
+                <a:ea typeface="Microsoft YaHei"/>
+                <a:cs typeface="Microsoft YaHei"/>
+              </a:rPr>
+              <a:t> / 08</a:t>
             </a:r>
           </a:p>
         </p:txBody>
@@ -20959,7 +21965,7 @@
               </a:defRPr>
             </a:pPr>
             <a:r>
-              <a:rPr sz="1200" b="1">
+              <a:rPr sz="1200" b="1" dirty="0">
                 <a:solidFill>
                   <a:srgbClr val="0F766E"/>
                 </a:solidFill>
@@ -20967,7 +21973,7 @@
                 <a:ea typeface="Microsoft YaHei"/>
                 <a:cs typeface="Microsoft YaHei"/>
               </a:rPr>
-              <a:t>MOS SMP DEFENSE</a:t>
+              <a:t>MOS SMP</a:t>
             </a:r>
           </a:p>
         </p:txBody>
@@ -22351,7 +23357,7 @@
               </a:defRPr>
             </a:pPr>
             <a:r>
-              <a:rPr sz="1050">
+              <a:rPr sz="1050" dirty="0">
                 <a:solidFill>
                   <a:srgbClr val="64748B"/>
                 </a:solidFill>
@@ -22359,7 +23365,40 @@
                 <a:ea typeface="Microsoft YaHei"/>
                 <a:cs typeface="Microsoft YaHei"/>
               </a:rPr>
-              <a:t>SMP 多核移植实现答辩 / 09</a:t>
+              <a:t>SMP </a:t>
+            </a:r>
+            <a:r>
+              <a:rPr sz="1050" dirty="0" err="1">
+                <a:solidFill>
+                  <a:srgbClr val="64748B"/>
+                </a:solidFill>
+                <a:latin typeface="Microsoft YaHei"/>
+                <a:ea typeface="Microsoft YaHei"/>
+                <a:cs typeface="Microsoft YaHei"/>
+              </a:rPr>
+              <a:t>多核移植实现</a:t>
+            </a:r>
+            <a:r>
+              <a:rPr lang="zh-CN" altLang="en-US" sz="1050" dirty="0">
+                <a:solidFill>
+                  <a:srgbClr val="64748B"/>
+                </a:solidFill>
+                <a:latin typeface="Microsoft YaHei"/>
+                <a:ea typeface="Microsoft YaHei"/>
+                <a:cs typeface="Microsoft YaHei"/>
+              </a:rPr>
+              <a:t> </a:t>
+            </a:r>
+            <a:r>
+              <a:rPr sz="1050" dirty="0">
+                <a:solidFill>
+                  <a:srgbClr val="64748B"/>
+                </a:solidFill>
+                <a:latin typeface="Microsoft YaHei"/>
+                <a:ea typeface="Microsoft YaHei"/>
+                <a:cs typeface="Microsoft YaHei"/>
+              </a:rPr>
+              <a:t>/ 09</a:t>
             </a:r>
           </a:p>
         </p:txBody>

--- a/smp-defense-redesign-v4.pptx
+++ b/smp-defense-redesign-v4.pptx
@@ -3324,6 +3324,45 @@
                 <a:cs typeface="Microsoft YaHei"/>
               </a:rPr>
               <a:t>远端 env 销毁</a:t>
+            </a:r>
+          </a:p>
+        </p:txBody>
+      </p:sp>
+      <p:sp>
+        <p:nvSpPr>
+          <p:cNvPr id="16" name="文本框 15">
+            <a:extLst>
+              <a:ext uri="{FF2B5EF4-FFF2-40B4-BE49-F238E27FC236}">
+                <a16:creationId xmlns:a16="http://schemas.microsoft.com/office/drawing/2014/main" id="{7E8C36D2-8C26-4017-9018-8487CA3CA7EF}"/>
+              </a:ext>
+            </a:extLst>
+          </p:cNvPr>
+          <p:cNvSpPr txBox="1"/>
+          <p:nvPr/>
+        </p:nvSpPr>
+        <p:spPr>
+          <a:xfrm>
+            <a:off x="493486" y="5631543"/>
+            <a:ext cx="2040164" cy="369332"/>
+          </a:xfrm>
+          <a:prstGeom prst="rect">
+            <a:avLst/>
+          </a:prstGeom>
+          <a:noFill/>
+        </p:spPr>
+        <p:txBody>
+          <a:bodyPr wrap="square" rtlCol="0">
+            <a:spAutoFit/>
+          </a:bodyPr>
+          <a:lstStyle/>
+          <a:p>
+            <a:r>
+              <a:rPr lang="zh-CN" altLang="en-US" dirty="0">
+                <a:latin typeface="萝莉体 第二版" panose="02000500000000000000" pitchFamily="2" charset="-122"/>
+                <a:ea typeface="萝莉体 第二版" panose="02000500000000000000" pitchFamily="2" charset="-122"/>
+                <a:cs typeface="萝莉体 第二版" panose="02000500000000000000" pitchFamily="2" charset="-122"/>
+              </a:rPr>
+              <a:t>杨璞 李昊泽</a:t>
             </a:r>
           </a:p>
         </p:txBody>

--- a/smp-defense-redesign-v4.pptx
+++ b/smp-defense-redesign-v4.pptx
@@ -445,27 +445,188 @@
           <a:lstStyle/>
           <a:p>
             <a:r>
-              <a:t>强调 FS 是本实现的工程约束：fs_serv 固定在 CPU0，普通用户程序仍可多核调度，通过 IPC 请求服务。</a:t>
-            </a:r>
-          </a:p>
-          <a:p>
-            <a:r>
-              <a:t>IDE PIO 操作顺序性很强，因此用户态 ide_lock 保护完整读写序列，内核 dev syscall 也对 console 和 IDE MMIO 分别加锁。</a:t>
-            </a:r>
-          </a:p>
-          <a:p>
-            <a:r>
-              <a:t>【可直接朗读】</a:t>
-            </a:r>
-          </a:p>
-          <a:p>
-            <a:r>
-              <a:t>文件系统和设备这一页主要讲工程取舍。fs_serv 被固定在 CPU0，是为了让文件系统服务和 IDE 设备访问先保持可控，不把问题一下子扩大到所有共享状态都并发。</a:t>
-            </a:r>
-          </a:p>
-          <a:p>
-            <a:r>
-              <a:t>但这不影响普通用户程序在两个 CPU 上调度。CPU1 上的程序需要读文件时，仍然可以通过 IPC 请求 fs_serv。对于 console 和 IDE 这些直接设备路径，我们也加了锁，保证访问顺序不会乱掉。</a:t>
+              <a:rPr dirty="0" err="1"/>
+              <a:t>强调</a:t>
+            </a:r>
+            <a:r>
+              <a:rPr dirty="0"/>
+              <a:t> FS </a:t>
+            </a:r>
+            <a:r>
+              <a:rPr dirty="0" err="1"/>
+              <a:t>是本实现的工程约束：fs_serv</a:t>
+            </a:r>
+            <a:r>
+              <a:rPr dirty="0"/>
+              <a:t> </a:t>
+            </a:r>
+            <a:r>
+              <a:rPr dirty="0" err="1"/>
+              <a:t>固定在</a:t>
+            </a:r>
+            <a:r>
+              <a:rPr dirty="0"/>
+              <a:t> CPU0，普通用户程序仍可多核调度，通过 IPC </a:t>
+            </a:r>
+            <a:r>
+              <a:rPr dirty="0" err="1"/>
+              <a:t>请求服务</a:t>
+            </a:r>
+            <a:r>
+              <a:rPr dirty="0"/>
+              <a:t>。</a:t>
+            </a:r>
+          </a:p>
+          <a:p>
+            <a:r>
+              <a:rPr dirty="0"/>
+              <a:t>IDE</a:t>
+            </a:r>
+            <a:r>
+              <a:rPr lang="zh-CN" altLang="en-US" dirty="0"/>
+              <a:t>（</a:t>
+            </a:r>
+            <a:r>
+              <a:rPr lang="zh-CN" altLang="zh-CN" dirty="0"/>
+              <a:t>内存映射 I/O</a:t>
+            </a:r>
+            <a:r>
+              <a:rPr lang="zh-CN" altLang="en-US" dirty="0"/>
+              <a:t>）</a:t>
+            </a:r>
+            <a:r>
+              <a:rPr dirty="0"/>
+              <a:t> PIO </a:t>
+            </a:r>
+            <a:r>
+              <a:rPr dirty="0" err="1"/>
+              <a:t>操作顺序性很强，因此用户态</a:t>
+            </a:r>
+            <a:r>
+              <a:rPr dirty="0"/>
+              <a:t> </a:t>
+            </a:r>
+            <a:r>
+              <a:rPr dirty="0" err="1"/>
+              <a:t>ide_lock</a:t>
+            </a:r>
+            <a:r>
+              <a:rPr dirty="0"/>
+              <a:t> </a:t>
+            </a:r>
+            <a:r>
+              <a:rPr dirty="0" err="1"/>
+              <a:t>保护完整读写序列，内核</a:t>
+            </a:r>
+            <a:r>
+              <a:rPr dirty="0"/>
+              <a:t> dev </a:t>
+            </a:r>
+            <a:r>
+              <a:rPr dirty="0" err="1"/>
+              <a:t>syscall</a:t>
+            </a:r>
+            <a:r>
+              <a:rPr dirty="0"/>
+              <a:t> </a:t>
+            </a:r>
+            <a:r>
+              <a:rPr dirty="0" err="1"/>
+              <a:t>也对</a:t>
+            </a:r>
+            <a:r>
+              <a:rPr dirty="0"/>
+              <a:t> console 和 IDE MMIO </a:t>
+            </a:r>
+            <a:r>
+              <a:rPr dirty="0" err="1"/>
+              <a:t>分别加锁</a:t>
+            </a:r>
+            <a:r>
+              <a:rPr dirty="0"/>
+              <a:t>。</a:t>
+            </a:r>
+          </a:p>
+          <a:p>
+            <a:r>
+              <a:rPr dirty="0"/>
+              <a:t>【</a:t>
+            </a:r>
+            <a:r>
+              <a:rPr dirty="0" err="1"/>
+              <a:t>可直接朗读</a:t>
+            </a:r>
+            <a:r>
+              <a:rPr dirty="0"/>
+              <a:t>】</a:t>
+            </a:r>
+          </a:p>
+          <a:p>
+            <a:r>
+              <a:rPr dirty="0" err="1"/>
+              <a:t>文件系统和设备这一页主要讲工程取舍。fs_serv</a:t>
+            </a:r>
+            <a:r>
+              <a:rPr dirty="0"/>
+              <a:t> </a:t>
+            </a:r>
+            <a:r>
+              <a:rPr dirty="0" err="1"/>
+              <a:t>被固定在</a:t>
+            </a:r>
+            <a:r>
+              <a:rPr dirty="0"/>
+              <a:t> CPU0，是为了让文件系统服务和 IDE </a:t>
+            </a:r>
+            <a:r>
+              <a:rPr dirty="0" err="1"/>
+              <a:t>设备访问先保持可控，不把问题一下子扩大到所有共享状态都并发</a:t>
+            </a:r>
+            <a:r>
+              <a:rPr dirty="0"/>
+              <a:t>。</a:t>
+            </a:r>
+          </a:p>
+          <a:p>
+            <a:r>
+              <a:rPr dirty="0" err="1"/>
+              <a:t>但这不影响普通用户程序在两个</a:t>
+            </a:r>
+            <a:r>
+              <a:rPr dirty="0"/>
+              <a:t> CPU 上调度。CPU1 </a:t>
+            </a:r>
+            <a:r>
+              <a:rPr dirty="0" err="1"/>
+              <a:t>上的程序需要读文件时，仍然可以通过</a:t>
+            </a:r>
+            <a:r>
+              <a:rPr dirty="0"/>
+              <a:t> IPC </a:t>
+            </a:r>
+            <a:r>
+              <a:rPr dirty="0" err="1"/>
+              <a:t>请求</a:t>
+            </a:r>
+            <a:r>
+              <a:rPr dirty="0"/>
+              <a:t> </a:t>
+            </a:r>
+            <a:r>
+              <a:rPr dirty="0" err="1"/>
+              <a:t>fs_serv。对于</a:t>
+            </a:r>
+            <a:r>
+              <a:rPr dirty="0"/>
+              <a:t> console 和 IDE </a:t>
+            </a:r>
+            <a:r>
+              <a:rPr dirty="0" err="1"/>
+              <a:t>这些直接设备路径，我们也加了锁，保证访问顺序不会乱掉</a:t>
+            </a:r>
+            <a:r>
+              <a:rPr dirty="0"/>
+              <a:t>。</a:t>
             </a:r>
           </a:p>
         </p:txBody>
